--- a/rental-cre/demo/RegShield_Presentation.pptx
+++ b/rental-cre/demo/RegShield_Presentation.pptx
@@ -4,21 +4,24 @@
   <p:sldMasterIdLst>
     <p:sldMasterId id="2147483648" r:id="rId1"/>
   </p:sldMasterIdLst>
+  <p:notesMasterIdLst>
+    <p:notesMasterId r:id="rId14"/>
+  </p:notesMasterIdLst>
   <p:sldIdLst>
-    <p:sldId id="256" r:id="rId7"/>
-    <p:sldId id="257" r:id="rId8"/>
-    <p:sldId id="258" r:id="rId9"/>
-    <p:sldId id="259" r:id="rId10"/>
-    <p:sldId id="260" r:id="rId11"/>
-    <p:sldId id="261" r:id="rId12"/>
-    <p:sldId id="262" r:id="rId13"/>
-    <p:sldId id="263" r:id="rId14"/>
-    <p:sldId id="264" r:id="rId15"/>
-    <p:sldId id="265" r:id="rId16"/>
-    <p:sldId id="266" r:id="rId17"/>
-    <p:sldId id="267" r:id="rId18"/>
+    <p:sldId id="256" r:id="rId2"/>
+    <p:sldId id="257" r:id="rId3"/>
+    <p:sldId id="258" r:id="rId4"/>
+    <p:sldId id="259" r:id="rId5"/>
+    <p:sldId id="260" r:id="rId6"/>
+    <p:sldId id="261" r:id="rId7"/>
+    <p:sldId id="262" r:id="rId8"/>
+    <p:sldId id="263" r:id="rId9"/>
+    <p:sldId id="264" r:id="rId10"/>
+    <p:sldId id="265" r:id="rId11"/>
+    <p:sldId id="266" r:id="rId12"/>
+    <p:sldId id="267" r:id="rId13"/>
   </p:sldIdLst>
-  <p:sldSz cx="12191695" cy="6858000" type="screen4x3"/>
+  <p:sldSz cx="12192000" cy="6858000"/>
   <p:notesSz cx="6858000" cy="9144000"/>
   <p:defaultTextStyle>
     <a:defPPr>
@@ -115,7 +118,1754 @@
       </a:defRPr>
     </a:lvl9pPr>
   </p:defaultTextStyle>
+  <p:extLst>
+    <p:ext uri="{EFAFB233-063F-42B5-8137-9DF3F51BA10A}">
+      <p15:sldGuideLst xmlns:p15="http://schemas.microsoft.com/office/powerpoint/2012/main">
+        <p15:guide id="1" orient="horz" pos="2160">
+          <p15:clr>
+            <a:srgbClr val="A4A3A4"/>
+          </p15:clr>
+        </p15:guide>
+        <p15:guide id="2" pos="2880">
+          <p15:clr>
+            <a:srgbClr val="A4A3A4"/>
+          </p15:clr>
+        </p15:guide>
+      </p15:sldGuideLst>
+    </p:ext>
+  </p:extLst>
 </p:presentation>
+</file>
+
+<file path=ppt/notesMasters/notesMaster1.xml><?xml version="1.0" encoding="utf-8"?>
+<p:notesMaster xmlns:a="http://schemas.openxmlformats.org/drawingml/2006/main" xmlns:r="http://schemas.openxmlformats.org/officeDocument/2006/relationships" xmlns:p="http://schemas.openxmlformats.org/presentationml/2006/main">
+  <p:cSld>
+    <p:bg>
+      <p:bgRef idx="1001">
+        <a:schemeClr val="bg1"/>
+      </p:bgRef>
+    </p:bg>
+    <p:spTree>
+      <p:nvGrpSpPr>
+        <p:cNvPr id="1" name=""/>
+        <p:cNvGrpSpPr/>
+        <p:nvPr/>
+      </p:nvGrpSpPr>
+      <p:grpSpPr>
+        <a:xfrm>
+          <a:off x="0" y="0"/>
+          <a:ext cx="0" cy="0"/>
+          <a:chOff x="0" y="0"/>
+          <a:chExt cx="0" cy="0"/>
+        </a:xfrm>
+      </p:grpSpPr>
+    </p:spTree>
+    <p:extLst>
+      <p:ext uri="{BB962C8B-B14F-4D97-AF65-F5344CB8AC3E}">
+        <p14:creationId xmlns:p14="http://schemas.microsoft.com/office/powerpoint/2010/main" val="2593412209"/>
+      </p:ext>
+    </p:extLst>
+  </p:cSld>
+  <p:clrMap bg1="lt1" tx1="dk1" bg2="lt2" tx2="dk2" accent1="accent1" accent2="accent2" accent3="accent3" accent4="accent4" accent5="accent5" accent6="accent6" hlink="hlink" folHlink="folHlink"/>
+  <p:notesStyle>
+    <a:lvl1pPr marL="0" algn="l" defTabSz="914400" rtl="0" eaLnBrk="1" latinLnBrk="0" hangingPunct="1">
+      <a:defRPr sz="1200" kern="1200">
+        <a:solidFill>
+          <a:schemeClr val="tx1"/>
+        </a:solidFill>
+        <a:latin typeface="+mn-lt"/>
+        <a:ea typeface="+mn-ea"/>
+        <a:cs typeface="+mn-cs"/>
+      </a:defRPr>
+    </a:lvl1pPr>
+    <a:lvl2pPr marL="457200" algn="l" defTabSz="914400" rtl="0" eaLnBrk="1" latinLnBrk="0" hangingPunct="1">
+      <a:defRPr sz="1200" kern="1200">
+        <a:solidFill>
+          <a:schemeClr val="tx1"/>
+        </a:solidFill>
+        <a:latin typeface="+mn-lt"/>
+        <a:ea typeface="+mn-ea"/>
+        <a:cs typeface="+mn-cs"/>
+      </a:defRPr>
+    </a:lvl2pPr>
+    <a:lvl3pPr marL="914400" algn="l" defTabSz="914400" rtl="0" eaLnBrk="1" latinLnBrk="0" hangingPunct="1">
+      <a:defRPr sz="1200" kern="1200">
+        <a:solidFill>
+          <a:schemeClr val="tx1"/>
+        </a:solidFill>
+        <a:latin typeface="+mn-lt"/>
+        <a:ea typeface="+mn-ea"/>
+        <a:cs typeface="+mn-cs"/>
+      </a:defRPr>
+    </a:lvl3pPr>
+    <a:lvl4pPr marL="1371600" algn="l" defTabSz="914400" rtl="0" eaLnBrk="1" latinLnBrk="0" hangingPunct="1">
+      <a:defRPr sz="1200" kern="1200">
+        <a:solidFill>
+          <a:schemeClr val="tx1"/>
+        </a:solidFill>
+        <a:latin typeface="+mn-lt"/>
+        <a:ea typeface="+mn-ea"/>
+        <a:cs typeface="+mn-cs"/>
+      </a:defRPr>
+    </a:lvl4pPr>
+    <a:lvl5pPr marL="1828800" algn="l" defTabSz="914400" rtl="0" eaLnBrk="1" latinLnBrk="0" hangingPunct="1">
+      <a:defRPr sz="1200" kern="1200">
+        <a:solidFill>
+          <a:schemeClr val="tx1"/>
+        </a:solidFill>
+        <a:latin typeface="+mn-lt"/>
+        <a:ea typeface="+mn-ea"/>
+        <a:cs typeface="+mn-cs"/>
+      </a:defRPr>
+    </a:lvl5pPr>
+    <a:lvl6pPr marL="2286000" algn="l" defTabSz="914400" rtl="0" eaLnBrk="1" latinLnBrk="0" hangingPunct="1">
+      <a:defRPr sz="1200" kern="1200">
+        <a:solidFill>
+          <a:schemeClr val="tx1"/>
+        </a:solidFill>
+        <a:latin typeface="+mn-lt"/>
+        <a:ea typeface="+mn-ea"/>
+        <a:cs typeface="+mn-cs"/>
+      </a:defRPr>
+    </a:lvl6pPr>
+    <a:lvl7pPr marL="2743200" algn="l" defTabSz="914400" rtl="0" eaLnBrk="1" latinLnBrk="0" hangingPunct="1">
+      <a:defRPr sz="1200" kern="1200">
+        <a:solidFill>
+          <a:schemeClr val="tx1"/>
+        </a:solidFill>
+        <a:latin typeface="+mn-lt"/>
+        <a:ea typeface="+mn-ea"/>
+        <a:cs typeface="+mn-cs"/>
+      </a:defRPr>
+    </a:lvl7pPr>
+    <a:lvl8pPr marL="3200400" algn="l" defTabSz="914400" rtl="0" eaLnBrk="1" latinLnBrk="0" hangingPunct="1">
+      <a:defRPr sz="1200" kern="1200">
+        <a:solidFill>
+          <a:schemeClr val="tx1"/>
+        </a:solidFill>
+        <a:latin typeface="+mn-lt"/>
+        <a:ea typeface="+mn-ea"/>
+        <a:cs typeface="+mn-cs"/>
+      </a:defRPr>
+    </a:lvl8pPr>
+    <a:lvl9pPr marL="3657600" algn="l" defTabSz="914400" rtl="0" eaLnBrk="1" latinLnBrk="0" hangingPunct="1">
+      <a:defRPr sz="1200" kern="1200">
+        <a:solidFill>
+          <a:schemeClr val="tx1"/>
+        </a:solidFill>
+        <a:latin typeface="+mn-lt"/>
+        <a:ea typeface="+mn-ea"/>
+        <a:cs typeface="+mn-cs"/>
+      </a:defRPr>
+    </a:lvl9pPr>
+  </p:notesStyle>
+</p:notesMaster>
+</file>
+
+<file path=ppt/notesSlides/notesSlide1.xml><?xml version="1.0" encoding="utf-8"?>
+<p:notes xmlns:a="http://schemas.openxmlformats.org/drawingml/2006/main" xmlns:r="http://schemas.openxmlformats.org/officeDocument/2006/relationships" xmlns:p="http://schemas.openxmlformats.org/presentationml/2006/main">
+  <p:cSld>
+    <p:spTree>
+      <p:nvGrpSpPr>
+        <p:cNvPr id="1" name=""/>
+        <p:cNvGrpSpPr/>
+        <p:nvPr/>
+      </p:nvGrpSpPr>
+      <p:grpSpPr>
+        <a:xfrm>
+          <a:off x="0" y="0"/>
+          <a:ext cx="0" cy="0"/>
+          <a:chOff x="0" y="0"/>
+          <a:chExt cx="0" cy="0"/>
+        </a:xfrm>
+      </p:grpSpPr>
+      <p:sp>
+        <p:nvSpPr>
+          <p:cNvPr id="2" name="Slide Image Placeholder 1"/>
+          <p:cNvSpPr>
+            <a:spLocks noGrp="1" noRot="1" noChangeAspect="1"/>
+          </p:cNvSpPr>
+          <p:nvPr>
+            <p:ph type="sldImg" idx="2"/>
+          </p:nvPr>
+        </p:nvSpPr>
+        <p:spPr/>
+      </p:sp>
+      <p:sp>
+        <p:nvSpPr>
+          <p:cNvPr id="3" name="Notes Placeholder 2"/>
+          <p:cNvSpPr>
+            <a:spLocks noGrp="1"/>
+          </p:cNvSpPr>
+          <p:nvPr>
+            <p:ph type="body" sz="quarter" idx="3"/>
+          </p:nvPr>
+        </p:nvSpPr>
+        <p:spPr/>
+        <p:txBody>
+          <a:bodyPr/>
+          <a:lstStyle/>
+          <a:p>
+            <a:r>
+              <a:t>Hi everyone, I'm [Your Name] and today I'm presenting RegShield — a tokenized vehicle rental platform built for the Chainlink Block Magic Hackathon.</a:t>
+            </a:r>
+          </a:p>
+          <a:p>
+            <a:endParaRPr/>
+          </a:p>
+          <a:p>
+            <a:r>
+              <a:t>RegShield lets investors buy fractional ownership of real vehicles using blockchain, and earn real rental revenue — all enforced on-chain with ERC-3643 compliance tokens.</a:t>
+            </a:r>
+          </a:p>
+          <a:p>
+            <a:endParaRPr/>
+          </a:p>
+          <a:p>
+            <a:r>
+              <a:t>We heavily leverage two sponsors: Chainlink CRE for decentralized automation, and WorldID for sybil-resistant investor onboarding. Let me walk you through how it all works.</a:t>
+            </a:r>
+          </a:p>
+        </p:txBody>
+      </p:sp>
+      <p:sp>
+        <p:nvSpPr>
+          <p:cNvPr id="4" name="Slide Number Placeholder 3"/>
+          <p:cNvSpPr>
+            <a:spLocks noGrp="1"/>
+          </p:cNvSpPr>
+          <p:nvPr>
+            <p:ph type="sldNum" sz="quarter" idx="5"/>
+          </p:nvPr>
+        </p:nvSpPr>
+        <p:spPr/>
+      </p:sp>
+    </p:spTree>
+  </p:cSld>
+  <p:clrMapOvr>
+    <a:masterClrMapping/>
+  </p:clrMapOvr>
+</p:notes>
+</file>
+
+<file path=ppt/notesSlides/notesSlide10.xml><?xml version="1.0" encoding="utf-8"?>
+<p:notes xmlns:a="http://schemas.openxmlformats.org/drawingml/2006/main" xmlns:r="http://schemas.openxmlformats.org/officeDocument/2006/relationships" xmlns:p="http://schemas.openxmlformats.org/presentationml/2006/main">
+  <p:cSld>
+    <p:spTree>
+      <p:nvGrpSpPr>
+        <p:cNvPr id="1" name=""/>
+        <p:cNvGrpSpPr/>
+        <p:nvPr/>
+      </p:nvGrpSpPr>
+      <p:grpSpPr>
+        <a:xfrm>
+          <a:off x="0" y="0"/>
+          <a:ext cx="0" cy="0"/>
+          <a:chOff x="0" y="0"/>
+          <a:chExt cx="0" cy="0"/>
+        </a:xfrm>
+      </p:grpSpPr>
+      <p:sp>
+        <p:nvSpPr>
+          <p:cNvPr id="2" name="Slide Image Placeholder 1"/>
+          <p:cNvSpPr>
+            <a:spLocks noGrp="1" noRot="1" noChangeAspect="1"/>
+          </p:cNvSpPr>
+          <p:nvPr>
+            <p:ph type="sldImg" idx="2"/>
+          </p:nvPr>
+        </p:nvSpPr>
+        <p:spPr/>
+      </p:sp>
+      <p:sp>
+        <p:nvSpPr>
+          <p:cNvPr id="3" name="Notes Placeholder 2"/>
+          <p:cNvSpPr>
+            <a:spLocks noGrp="1"/>
+          </p:cNvSpPr>
+          <p:nvPr>
+            <p:ph type="body" sz="quarter" idx="3"/>
+          </p:nvPr>
+        </p:nvSpPr>
+        <p:spPr/>
+        <p:txBody>
+          <a:bodyPr/>
+          <a:lstStyle/>
+          <a:p>
+            <a:r>
+              <a:t>Here are our CRE simulation results — all 5 workflows pass successfully.</a:t>
+            </a:r>
+          </a:p>
+          <a:p>
+            <a:endParaRPr/>
+          </a:p>
+          <a:p>
+            <a:r>
+              <a:t>The onboarding workflow generates 5 reports covering investor identity verification. The campaign workflow produces 2 reports for expired campaign detection. The rental workflow generates 3 milestone verification reports. The vehicle workflow produces 3 telemetry reports with odometer data. And the compliance workflow generates 3 compliance monitoring reports.</a:t>
+            </a:r>
+          </a:p>
+          <a:p>
+            <a:endParaRPr/>
+          </a:p>
+          <a:p>
+            <a:r>
+              <a:t>That's 16 total reports across 5 workflows, all submitted to 5 Receiver contracts on Sepolia.</a:t>
+            </a:r>
+          </a:p>
+          <a:p>
+            <a:endParaRPr/>
+          </a:p>
+          <a:p>
+            <a:r>
+              <a:t>These workflows are currently running in simulation mode using the CRE SDK simulator. The simulator validates the WASM binaries, consensus logic, and report encoding. All 5 are ready for DON deployment once we have access to a live Chainlink node.</a:t>
+            </a:r>
+          </a:p>
+          <a:p>
+            <a:endParaRPr/>
+          </a:p>
+          <a:p>
+            <a:r>
+              <a:t>We have 34 smart contracts deployed on Sepolia backing all of this.</a:t>
+            </a:r>
+          </a:p>
+        </p:txBody>
+      </p:sp>
+      <p:sp>
+        <p:nvSpPr>
+          <p:cNvPr id="4" name="Slide Number Placeholder 3"/>
+          <p:cNvSpPr>
+            <a:spLocks noGrp="1"/>
+          </p:cNvSpPr>
+          <p:nvPr>
+            <p:ph type="sldNum" sz="quarter" idx="5"/>
+          </p:nvPr>
+        </p:nvSpPr>
+        <p:spPr/>
+      </p:sp>
+    </p:spTree>
+  </p:cSld>
+  <p:clrMapOvr>
+    <a:masterClrMapping/>
+  </p:clrMapOvr>
+</p:notes>
+</file>
+
+<file path=ppt/notesSlides/notesSlide11.xml><?xml version="1.0" encoding="utf-8"?>
+<p:notes xmlns:a="http://schemas.openxmlformats.org/drawingml/2006/main" xmlns:r="http://schemas.openxmlformats.org/officeDocument/2006/relationships" xmlns:p="http://schemas.openxmlformats.org/presentationml/2006/main">
+  <p:cSld>
+    <p:spTree>
+      <p:nvGrpSpPr>
+        <p:cNvPr id="1" name=""/>
+        <p:cNvGrpSpPr/>
+        <p:nvPr/>
+      </p:nvGrpSpPr>
+      <p:grpSpPr>
+        <a:xfrm>
+          <a:off x="0" y="0"/>
+          <a:ext cx="0" cy="0"/>
+          <a:chOff x="0" y="0"/>
+          <a:chExt cx="0" cy="0"/>
+        </a:xfrm>
+      </p:grpSpPr>
+      <p:sp>
+        <p:nvSpPr>
+          <p:cNvPr id="2" name="Slide Image Placeholder 1"/>
+          <p:cNvSpPr>
+            <a:spLocks noGrp="1" noRot="1" noChangeAspect="1"/>
+          </p:cNvSpPr>
+          <p:nvPr>
+            <p:ph type="sldImg" idx="2"/>
+          </p:nvPr>
+        </p:nvSpPr>
+        <p:spPr/>
+      </p:sp>
+      <p:sp>
+        <p:nvSpPr>
+          <p:cNvPr id="3" name="Notes Placeholder 2"/>
+          <p:cNvSpPr>
+            <a:spLocks noGrp="1"/>
+          </p:cNvSpPr>
+          <p:nvPr>
+            <p:ph type="body" sz="quarter" idx="3"/>
+          </p:nvPr>
+        </p:nvSpPr>
+        <p:spPr/>
+        <p:txBody>
+          <a:bodyPr/>
+          <a:lstStyle/>
+          <a:p>
+            <a:r>
+              <a:t>Quick overview of our tech stack.</a:t>
+            </a:r>
+          </a:p>
+          <a:p>
+            <a:endParaRPr/>
+          </a:p>
+          <a:p>
+            <a:r>
+              <a:t>Frontend — Next.js 14 with App Router, TypeScript, TailwindCSS for styling, Wagmi v3 and Viem v2 for blockchain interaction, Thirdweb SDK for wallet connectivity, and Framer Motion for animations.</a:t>
+            </a:r>
+          </a:p>
+          <a:p>
+            <a:endParaRPr/>
+          </a:p>
+          <a:p>
+            <a:r>
+              <a:t>Smart Contracts — Solidity 0.8.24, built and tested with Foundry. 34 contracts on Sepolia including ERC-721, ERC-3643 tokens, and OpenZeppelin v5.</a:t>
+            </a:r>
+          </a:p>
+          <a:p>
+            <a:endParaRPr/>
+          </a:p>
+          <a:p>
+            <a:r>
+              <a:t>Backend — Node.js with Express, MongoDB with Mongoose for data storage, JWT authentication, node-cron schedulers for the centralized services that CRE replaces, and ethers.js v6 for blockchain interaction.</a:t>
+            </a:r>
+          </a:p>
+          <a:p>
+            <a:endParaRPr/>
+          </a:p>
+          <a:p>
+            <a:r>
+              <a:t>Chainlink CRE — TypeScript workflows compiled to WASM using the CRE SDK and Bun, running on DON nodes with consensus aggregation, with 5 Receiver contracts.</a:t>
+            </a:r>
+          </a:p>
+          <a:p>
+            <a:endParaRPr/>
+          </a:p>
+          <a:p>
+            <a:r>
+              <a:t>Identity — WorldID MiniKit v1.9 for Orb-level ZK proofs, OnchainID from the T-REX protocol for ERC-3643 identity, and a full KYC document management system.</a:t>
+            </a:r>
+          </a:p>
+        </p:txBody>
+      </p:sp>
+      <p:sp>
+        <p:nvSpPr>
+          <p:cNvPr id="4" name="Slide Number Placeholder 3"/>
+          <p:cNvSpPr>
+            <a:spLocks noGrp="1"/>
+          </p:cNvSpPr>
+          <p:nvPr>
+            <p:ph type="sldNum" sz="quarter" idx="5"/>
+          </p:nvPr>
+        </p:nvSpPr>
+        <p:spPr/>
+      </p:sp>
+    </p:spTree>
+  </p:cSld>
+  <p:clrMapOvr>
+    <a:masterClrMapping/>
+  </p:clrMapOvr>
+</p:notes>
+</file>
+
+<file path=ppt/notesSlides/notesSlide12.xml><?xml version="1.0" encoding="utf-8"?>
+<p:notes xmlns:a="http://schemas.openxmlformats.org/drawingml/2006/main" xmlns:r="http://schemas.openxmlformats.org/officeDocument/2006/relationships" xmlns:p="http://schemas.openxmlformats.org/presentationml/2006/main">
+  <p:cSld>
+    <p:spTree>
+      <p:nvGrpSpPr>
+        <p:cNvPr id="1" name=""/>
+        <p:cNvGrpSpPr/>
+        <p:nvPr/>
+      </p:nvGrpSpPr>
+      <p:grpSpPr>
+        <a:xfrm>
+          <a:off x="0" y="0"/>
+          <a:ext cx="0" cy="0"/>
+          <a:chOff x="0" y="0"/>
+          <a:chExt cx="0" cy="0"/>
+        </a:xfrm>
+      </p:grpSpPr>
+      <p:sp>
+        <p:nvSpPr>
+          <p:cNvPr id="2" name="Slide Image Placeholder 1"/>
+          <p:cNvSpPr>
+            <a:spLocks noGrp="1" noRot="1" noChangeAspect="1"/>
+          </p:cNvSpPr>
+          <p:nvPr>
+            <p:ph type="sldImg" idx="2"/>
+          </p:nvPr>
+        </p:nvSpPr>
+        <p:spPr/>
+      </p:sp>
+      <p:sp>
+        <p:nvSpPr>
+          <p:cNvPr id="3" name="Notes Placeholder 2"/>
+          <p:cNvSpPr>
+            <a:spLocks noGrp="1"/>
+          </p:cNvSpPr>
+          <p:nvPr>
+            <p:ph type="body" sz="quarter" idx="3"/>
+          </p:nvPr>
+        </p:nvSpPr>
+        <p:spPr/>
+        <p:txBody>
+          <a:bodyPr/>
+          <a:lstStyle/>
+          <a:p>
+            <a:r>
+              <a:t>To wrap up — here are our key takeaways.</a:t>
+            </a:r>
+          </a:p>
+          <a:p>
+            <a:endParaRPr/>
+          </a:p>
+          <a:p>
+            <a:r>
+              <a:t>Chainlink CRE replaces 4 centralized backend services and adds 1 entirely new capability — real-time compliance monitoring — that wasn't possible with our traditional architecture.</a:t>
+            </a:r>
+          </a:p>
+          <a:p>
+            <a:endParaRPr/>
+          </a:p>
+          <a:p>
+            <a:r>
+              <a:t>WorldID provides sybil-resistant proof-of-personhood, ensuring one human equals one verified investor. No fake accounts, no gaming the system.</a:t>
+            </a:r>
+          </a:p>
+          <a:p>
+            <a:endParaRPr/>
+          </a:p>
+          <a:p>
+            <a:r>
+              <a:t>ERC-3643 security tokens enforce regulatory compliance on-chain. Every token transfer is checked against the Identity Registry and compliance rules.</a:t>
+            </a:r>
+          </a:p>
+          <a:p>
+            <a:endParaRPr/>
+          </a:p>
+          <a:p>
+            <a:r>
+              <a:t>We deployed 34 smart contracts on Sepolia and built 5 CRE workflows — all passing simulation and ready for DON deployment.</a:t>
+            </a:r>
+          </a:p>
+          <a:p>
+            <a:endParaRPr/>
+          </a:p>
+          <a:p>
+            <a:r>
+              <a:t>RegShield demonstrates how Chainlink CRE and WorldID can transform a traditional rental platform into a fully decentralized, compliant, and automated system.</a:t>
+            </a:r>
+          </a:p>
+          <a:p>
+            <a:endParaRPr/>
+          </a:p>
+          <a:p>
+            <a:r>
+              <a:t>Thank you for your time. I'm happy to answer any questions.</a:t>
+            </a:r>
+          </a:p>
+        </p:txBody>
+      </p:sp>
+      <p:sp>
+        <p:nvSpPr>
+          <p:cNvPr id="4" name="Slide Number Placeholder 3"/>
+          <p:cNvSpPr>
+            <a:spLocks noGrp="1"/>
+          </p:cNvSpPr>
+          <p:nvPr>
+            <p:ph type="sldNum" sz="quarter" idx="5"/>
+          </p:nvPr>
+        </p:nvSpPr>
+        <p:spPr/>
+      </p:sp>
+    </p:spTree>
+  </p:cSld>
+  <p:clrMapOvr>
+    <a:masterClrMapping/>
+  </p:clrMapOvr>
+</p:notes>
+</file>
+
+<file path=ppt/notesSlides/notesSlide2.xml><?xml version="1.0" encoding="utf-8"?>
+<p:notes xmlns:a="http://schemas.openxmlformats.org/drawingml/2006/main" xmlns:r="http://schemas.openxmlformats.org/officeDocument/2006/relationships" xmlns:p="http://schemas.openxmlformats.org/presentationml/2006/main">
+  <p:cSld>
+    <p:spTree>
+      <p:nvGrpSpPr>
+        <p:cNvPr id="1" name=""/>
+        <p:cNvGrpSpPr/>
+        <p:nvPr/>
+      </p:nvGrpSpPr>
+      <p:grpSpPr>
+        <a:xfrm>
+          <a:off x="0" y="0"/>
+          <a:ext cx="0" cy="0"/>
+          <a:chOff x="0" y="0"/>
+          <a:chExt cx="0" cy="0"/>
+        </a:xfrm>
+      </p:grpSpPr>
+      <p:sp>
+        <p:nvSpPr>
+          <p:cNvPr id="2" name="Slide Image Placeholder 1"/>
+          <p:cNvSpPr>
+            <a:spLocks noGrp="1" noRot="1" noChangeAspect="1"/>
+          </p:cNvSpPr>
+          <p:nvPr>
+            <p:ph type="sldImg" idx="2"/>
+          </p:nvPr>
+        </p:nvSpPr>
+        <p:spPr/>
+      </p:sp>
+      <p:sp>
+        <p:nvSpPr>
+          <p:cNvPr id="3" name="Notes Placeholder 2"/>
+          <p:cNvSpPr>
+            <a:spLocks noGrp="1"/>
+          </p:cNvSpPr>
+          <p:nvPr>
+            <p:ph type="body" sz="quarter" idx="3"/>
+          </p:nvPr>
+        </p:nvSpPr>
+        <p:spPr/>
+        <p:txBody>
+          <a:bodyPr/>
+          <a:lstStyle/>
+          <a:p>
+            <a:r>
+              <a:rPr dirty="0"/>
+              <a:t>So what problems are we solving?</a:t>
+            </a:r>
+          </a:p>
+          <a:p>
+            <a:endParaRPr dirty="0"/>
+          </a:p>
+          <a:p>
+            <a:r>
+              <a:rPr dirty="0"/>
+              <a:t>First — centralized backend. Traditional rental platforms rely on </a:t>
+            </a:r>
+            <a:r>
+              <a:rPr dirty="0" err="1"/>
+              <a:t>cron</a:t>
+            </a:r>
+            <a:r>
+              <a:rPr dirty="0"/>
+              <a:t> jobs running on a single server for bookings, campaigns, and revenue. If that server goes down, everything stops. There's no verifiability.</a:t>
+            </a:r>
+          </a:p>
+          <a:p>
+            <a:endParaRPr dirty="0"/>
+          </a:p>
+          <a:p>
+            <a:r>
+              <a:rPr dirty="0"/>
+              <a:t>Second — no on-chain compliance. Vehicle investments today have no regulatory framework enforced by code. Token transfers happen without any compliance checks.</a:t>
+            </a:r>
+          </a:p>
+          <a:p>
+            <a:endParaRPr dirty="0"/>
+          </a:p>
+          <a:p>
+            <a:r>
+              <a:rPr dirty="0"/>
+              <a:t>Third — sybil vulnerability. Without proof-of-personhood, one person can create multiple investor accounts and game investment allocations.</a:t>
+            </a:r>
+          </a:p>
+          <a:p>
+            <a:endParaRPr dirty="0"/>
+          </a:p>
+          <a:p>
+            <a:r>
+              <a:rPr dirty="0"/>
+              <a:t>Fourth — manual milestone verification. An admin has to manually check VIN numbers, insurance documents, and registration before releasing escrow funds. This is slow, error-prone, and doesn't scale.</a:t>
+            </a:r>
+          </a:p>
+          <a:p>
+            <a:endParaRPr dirty="0"/>
+          </a:p>
+          <a:p>
+            <a:r>
+              <a:rPr dirty="0" err="1"/>
+              <a:t>RegShield</a:t>
+            </a:r>
+            <a:r>
+              <a:rPr dirty="0"/>
+              <a:t> solves ALL of these with </a:t>
+            </a:r>
+            <a:r>
+              <a:rPr dirty="0" err="1"/>
+              <a:t>Chainlink</a:t>
+            </a:r>
+            <a:r>
+              <a:rPr dirty="0"/>
+              <a:t> CRE and </a:t>
+            </a:r>
+            <a:r>
+              <a:rPr dirty="0" err="1"/>
+              <a:t>WorldID</a:t>
+            </a:r>
+            <a:r>
+              <a:rPr dirty="0"/>
+              <a:t>.</a:t>
+            </a:r>
+          </a:p>
+        </p:txBody>
+      </p:sp>
+      <p:sp>
+        <p:nvSpPr>
+          <p:cNvPr id="4" name="Slide Number Placeholder 3"/>
+          <p:cNvSpPr>
+            <a:spLocks noGrp="1"/>
+          </p:cNvSpPr>
+          <p:nvPr>
+            <p:ph type="sldNum" sz="quarter" idx="5"/>
+          </p:nvPr>
+        </p:nvSpPr>
+        <p:spPr/>
+      </p:sp>
+    </p:spTree>
+  </p:cSld>
+  <p:clrMapOvr>
+    <a:masterClrMapping/>
+  </p:clrMapOvr>
+</p:notes>
+</file>
+
+<file path=ppt/notesSlides/notesSlide3.xml><?xml version="1.0" encoding="utf-8"?>
+<p:notes xmlns:a="http://schemas.openxmlformats.org/drawingml/2006/main" xmlns:r="http://schemas.openxmlformats.org/officeDocument/2006/relationships" xmlns:p="http://schemas.openxmlformats.org/presentationml/2006/main">
+  <p:cSld>
+    <p:spTree>
+      <p:nvGrpSpPr>
+        <p:cNvPr id="1" name=""/>
+        <p:cNvGrpSpPr/>
+        <p:nvPr/>
+      </p:nvGrpSpPr>
+      <p:grpSpPr>
+        <a:xfrm>
+          <a:off x="0" y="0"/>
+          <a:ext cx="0" cy="0"/>
+          <a:chOff x="0" y="0"/>
+          <a:chExt cx="0" cy="0"/>
+        </a:xfrm>
+      </p:grpSpPr>
+      <p:sp>
+        <p:nvSpPr>
+          <p:cNvPr id="2" name="Slide Image Placeholder 1"/>
+          <p:cNvSpPr>
+            <a:spLocks noGrp="1" noRot="1" noChangeAspect="1"/>
+          </p:cNvSpPr>
+          <p:nvPr>
+            <p:ph type="sldImg" idx="2"/>
+          </p:nvPr>
+        </p:nvSpPr>
+        <p:spPr/>
+      </p:sp>
+      <p:sp>
+        <p:nvSpPr>
+          <p:cNvPr id="3" name="Notes Placeholder 2"/>
+          <p:cNvSpPr>
+            <a:spLocks noGrp="1"/>
+          </p:cNvSpPr>
+          <p:nvPr>
+            <p:ph type="body" sz="quarter" idx="3"/>
+          </p:nvPr>
+        </p:nvSpPr>
+        <p:spPr/>
+        <p:txBody>
+          <a:bodyPr/>
+          <a:lstStyle/>
+          <a:p>
+            <a:r>
+              <a:t>Our solution has three pillars.</a:t>
+            </a:r>
+          </a:p>
+          <a:p>
+            <a:endParaRPr/>
+          </a:p>
+          <a:p>
+            <a:r>
+              <a:t>Chainlink CRE — this is the big one. We built 5 off-chain workflows that completely replace our backend cron jobs. These run on Chainlink's Decentralized Oracle Network, so there's no single point of failure. They handle everything from automated VIN validation via the NHTSA API, to milestone-based escrow verification, to vehicle telematics monitoring.</a:t>
+            </a:r>
+          </a:p>
+          <a:p>
+            <a:endParaRPr/>
+          </a:p>
+          <a:p>
+            <a:r>
+              <a:t>WorldID — we use Orb-level zero-knowledge verification for investor onboarding. This means one human equals one verified investor account. No sybil attacks possible. The verification happens through our WorldIDVerifier smart contract on Sepolia.</a:t>
+            </a:r>
+          </a:p>
+          <a:p>
+            <a:endParaRPr/>
+          </a:p>
+          <a:p>
+            <a:r>
+              <a:t>ERC-3643 Security Tokens — every vehicle gets two compliance tokens. An AssetToken representing fractional ownership, and a RevenueToken for quarterly rental income rights. The Identity Registry enforces transfer restrictions based on investor type and KYC status.</a:t>
+            </a:r>
+          </a:p>
+        </p:txBody>
+      </p:sp>
+      <p:sp>
+        <p:nvSpPr>
+          <p:cNvPr id="4" name="Slide Number Placeholder 3"/>
+          <p:cNvSpPr>
+            <a:spLocks noGrp="1"/>
+          </p:cNvSpPr>
+          <p:nvPr>
+            <p:ph type="sldNum" sz="quarter" idx="5"/>
+          </p:nvPr>
+        </p:nvSpPr>
+        <p:spPr/>
+      </p:sp>
+    </p:spTree>
+  </p:cSld>
+  <p:clrMapOvr>
+    <a:masterClrMapping/>
+  </p:clrMapOvr>
+</p:notes>
+</file>
+
+<file path=ppt/notesSlides/notesSlide4.xml><?xml version="1.0" encoding="utf-8"?>
+<p:notes xmlns:a="http://schemas.openxmlformats.org/drawingml/2006/main" xmlns:r="http://schemas.openxmlformats.org/officeDocument/2006/relationships" xmlns:p="http://schemas.openxmlformats.org/presentationml/2006/main">
+  <p:cSld>
+    <p:spTree>
+      <p:nvGrpSpPr>
+        <p:cNvPr id="1" name=""/>
+        <p:cNvGrpSpPr/>
+        <p:nvPr/>
+      </p:nvGrpSpPr>
+      <p:grpSpPr>
+        <a:xfrm>
+          <a:off x="0" y="0"/>
+          <a:ext cx="0" cy="0"/>
+          <a:chOff x="0" y="0"/>
+          <a:chExt cx="0" cy="0"/>
+        </a:xfrm>
+      </p:grpSpPr>
+      <p:sp>
+        <p:nvSpPr>
+          <p:cNvPr id="2" name="Slide Image Placeholder 1"/>
+          <p:cNvSpPr>
+            <a:spLocks noGrp="1" noRot="1" noChangeAspect="1"/>
+          </p:cNvSpPr>
+          <p:nvPr>
+            <p:ph type="sldImg" idx="2"/>
+          </p:nvPr>
+        </p:nvSpPr>
+        <p:spPr/>
+      </p:sp>
+      <p:sp>
+        <p:nvSpPr>
+          <p:cNvPr id="3" name="Notes Placeholder 2"/>
+          <p:cNvSpPr>
+            <a:spLocks noGrp="1"/>
+          </p:cNvSpPr>
+          <p:nvPr>
+            <p:ph type="body" sz="quarter" idx="3"/>
+          </p:nvPr>
+        </p:nvSpPr>
+        <p:spPr/>
+        <p:txBody>
+          <a:bodyPr/>
+          <a:lstStyle/>
+          <a:p>
+            <a:r>
+              <a:t>Here's the user journey in four steps.</a:t>
+            </a:r>
+          </a:p>
+          <a:p>
+            <a:endParaRPr/>
+          </a:p>
+          <a:p>
+            <a:r>
+              <a:t>Step 1 — An investor selects a vehicle campaign on our marketplace and commits ETH. The funds are locked in our PaymentEscrow smart contract. Nothing gets released until milestones are verified.</a:t>
+            </a:r>
+          </a:p>
+          <a:p>
+            <a:endParaRPr/>
+          </a:p>
+          <a:p>
+            <a:r>
+              <a:t>Step 2 — This is where Chainlink CRE comes in. Our CRE workflows automatically verify 4 milestones: VIN validation through the NHTSA API, proof of purchase, insurance verification, and vehicle registration. No manual admin approval needed.</a:t>
+            </a:r>
+          </a:p>
+          <a:p>
+            <a:endParaRPr/>
+          </a:p>
+          <a:p>
+            <a:r>
+              <a:t>Step 3 — Once milestones are verified, ERC-3643 AssetTokens and RevenueTokens are minted to the verified investors. These are compliance tokens — only KYC-verified, WorldID-verified investors can hold them.</a:t>
+            </a:r>
+          </a:p>
+          <a:p>
+            <a:endParaRPr/>
+          </a:p>
+          <a:p>
+            <a:r>
+              <a:t>Step 4 — The vehicle goes live on our rental platform and generates income. Revenue is distributed quarterly through a waterfall model: 50% to investors, 10% to the vehicle operator, and the rest covers maintenance and platform fees.</a:t>
+            </a:r>
+          </a:p>
+          <a:p>
+            <a:endParaRPr/>
+          </a:p>
+          <a:p>
+            <a:r>
+              <a:t>The key insight here — Chainlink CRE replaces 4 centralized backend services and adds 1 entirely new capability that wasn't possible before: real-time compliance monitoring.</a:t>
+            </a:r>
+          </a:p>
+        </p:txBody>
+      </p:sp>
+      <p:sp>
+        <p:nvSpPr>
+          <p:cNvPr id="4" name="Slide Number Placeholder 3"/>
+          <p:cNvSpPr>
+            <a:spLocks noGrp="1"/>
+          </p:cNvSpPr>
+          <p:nvPr>
+            <p:ph type="sldNum" sz="quarter" idx="5"/>
+          </p:nvPr>
+        </p:nvSpPr>
+        <p:spPr/>
+      </p:sp>
+    </p:spTree>
+  </p:cSld>
+  <p:clrMapOvr>
+    <a:masterClrMapping/>
+  </p:clrMapOvr>
+</p:notes>
+</file>
+
+<file path=ppt/notesSlides/notesSlide5.xml><?xml version="1.0" encoding="utf-8"?>
+<p:notes xmlns:a="http://schemas.openxmlformats.org/drawingml/2006/main" xmlns:r="http://schemas.openxmlformats.org/officeDocument/2006/relationships" xmlns:p="http://schemas.openxmlformats.org/presentationml/2006/main">
+  <p:cSld>
+    <p:spTree>
+      <p:nvGrpSpPr>
+        <p:cNvPr id="1" name=""/>
+        <p:cNvGrpSpPr/>
+        <p:nvPr/>
+      </p:nvGrpSpPr>
+      <p:grpSpPr>
+        <a:xfrm>
+          <a:off x="0" y="0"/>
+          <a:ext cx="0" cy="0"/>
+          <a:chOff x="0" y="0"/>
+          <a:chExt cx="0" cy="0"/>
+        </a:xfrm>
+      </p:grpSpPr>
+      <p:sp>
+        <p:nvSpPr>
+          <p:cNvPr id="2" name="Slide Image Placeholder 1"/>
+          <p:cNvSpPr>
+            <a:spLocks noGrp="1" noRot="1" noChangeAspect="1"/>
+          </p:cNvSpPr>
+          <p:nvPr>
+            <p:ph type="sldImg" idx="2"/>
+          </p:nvPr>
+        </p:nvSpPr>
+        <p:spPr/>
+      </p:sp>
+      <p:sp>
+        <p:nvSpPr>
+          <p:cNvPr id="3" name="Notes Placeholder 2"/>
+          <p:cNvSpPr>
+            <a:spLocks noGrp="1"/>
+          </p:cNvSpPr>
+          <p:nvPr>
+            <p:ph type="body" sz="quarter" idx="3"/>
+          </p:nvPr>
+        </p:nvSpPr>
+        <p:spPr/>
+        <p:txBody>
+          <a:bodyPr/>
+          <a:lstStyle/>
+          <a:p>
+            <a:r>
+              <a:rPr dirty="0"/>
+              <a:t>Let's dive deeper into our </a:t>
+            </a:r>
+            <a:r>
+              <a:rPr dirty="0" err="1"/>
+              <a:t>Chainlink</a:t>
+            </a:r>
+            <a:r>
+              <a:rPr dirty="0"/>
+              <a:t> CRE integration — this is the core of our project.</a:t>
+            </a:r>
+          </a:p>
+          <a:p>
+            <a:endParaRPr dirty="0"/>
+          </a:p>
+          <a:p>
+            <a:r>
+              <a:rPr dirty="0"/>
+              <a:t>We built 5 TypeScript workflows that compile to WASM and run on </a:t>
+            </a:r>
+            <a:r>
+              <a:rPr dirty="0" err="1"/>
+              <a:t>Chainlink</a:t>
+            </a:r>
+            <a:r>
+              <a:rPr dirty="0"/>
+              <a:t> DON nodes.</a:t>
+            </a:r>
+          </a:p>
+          <a:p>
+            <a:endParaRPr dirty="0"/>
+          </a:p>
+          <a:p>
+            <a:r>
+              <a:rPr dirty="0"/>
+              <a:t>The Onboarding workflow replaces manual admin approval. It auto-verifies investor identity by checking ERC-3643 Identity Registry and </a:t>
+            </a:r>
+            <a:r>
+              <a:rPr dirty="0" err="1"/>
+              <a:t>WorldID</a:t>
+            </a:r>
+            <a:r>
+              <a:rPr dirty="0"/>
+              <a:t> status, then generates 5 onboarding reports.</a:t>
+            </a:r>
+          </a:p>
+          <a:p>
+            <a:endParaRPr dirty="0"/>
+          </a:p>
+          <a:p>
+            <a:r>
+              <a:rPr dirty="0"/>
+              <a:t>The Campaign Monitor workflow replaces our </a:t>
+            </a:r>
+            <a:r>
+              <a:rPr dirty="0" err="1"/>
+              <a:t>campaignScheduler.js</a:t>
+            </a:r>
+            <a:r>
+              <a:rPr dirty="0"/>
+              <a:t> </a:t>
+            </a:r>
+            <a:r>
+              <a:rPr dirty="0" err="1"/>
+              <a:t>cron</a:t>
+            </a:r>
+            <a:r>
+              <a:rPr dirty="0"/>
+              <a:t> job. It detects expired or underfunded campaigns and triggers batch refunds automatically.</a:t>
+            </a:r>
+          </a:p>
+          <a:p>
+            <a:endParaRPr dirty="0"/>
+          </a:p>
+          <a:p>
+            <a:r>
+              <a:rPr dirty="0"/>
+              <a:t>The Rental Lifecycle workflow replaces </a:t>
+            </a:r>
+            <a:r>
+              <a:rPr dirty="0" err="1"/>
+              <a:t>bookingScheduler.js</a:t>
+            </a:r>
+            <a:r>
+              <a:rPr dirty="0"/>
+              <a:t>. It handles 4-milestone verification: VIN lookup, escrow check, insurance validation, and registration confirmation.</a:t>
+            </a:r>
+          </a:p>
+          <a:p>
+            <a:endParaRPr dirty="0"/>
+          </a:p>
+          <a:p>
+            <a:r>
+              <a:rPr dirty="0"/>
+              <a:t>The Vehicle Telematics workflow replaces </a:t>
+            </a:r>
+            <a:r>
+              <a:rPr dirty="0" err="1"/>
+              <a:t>revenueSyncService.js</a:t>
+            </a:r>
+            <a:r>
+              <a:rPr dirty="0"/>
+              <a:t>. It polls odometer and telemetry data and updates the </a:t>
+            </a:r>
+            <a:r>
+              <a:rPr dirty="0" err="1"/>
+              <a:t>VehicleNFT</a:t>
+            </a:r>
+            <a:r>
+              <a:rPr dirty="0"/>
+              <a:t> on-chain.</a:t>
+            </a:r>
+          </a:p>
+          <a:p>
+            <a:endParaRPr dirty="0"/>
+          </a:p>
+          <a:p>
+            <a:r>
+              <a:rPr dirty="0"/>
+              <a:t>And finally, the Compliance Monitor — this is a completely NEW capability that didn't exist before. It monitors registration expiry, insurance expiry, and overdue maintenance in real-time. This was impossible with our centralized backend.</a:t>
+            </a:r>
+          </a:p>
+          <a:p>
+            <a:endParaRPr dirty="0"/>
+          </a:p>
+          <a:p>
+            <a:r>
+              <a:rPr dirty="0"/>
+              <a:t>All 5 workflows submit ABI-encoded reports to 5 Receiver contracts deployed on </a:t>
+            </a:r>
+            <a:r>
+              <a:rPr dirty="0" err="1"/>
+              <a:t>Sepolia</a:t>
+            </a:r>
+            <a:r>
+              <a:rPr dirty="0"/>
+              <a:t>.</a:t>
+            </a:r>
+          </a:p>
+        </p:txBody>
+      </p:sp>
+      <p:sp>
+        <p:nvSpPr>
+          <p:cNvPr id="4" name="Slide Number Placeholder 3"/>
+          <p:cNvSpPr>
+            <a:spLocks noGrp="1"/>
+          </p:cNvSpPr>
+          <p:nvPr>
+            <p:ph type="sldNum" sz="quarter" idx="5"/>
+          </p:nvPr>
+        </p:nvSpPr>
+        <p:spPr/>
+      </p:sp>
+    </p:spTree>
+  </p:cSld>
+  <p:clrMapOvr>
+    <a:masterClrMapping/>
+  </p:clrMapOvr>
+</p:notes>
+</file>
+
+<file path=ppt/notesSlides/notesSlide6.xml><?xml version="1.0" encoding="utf-8"?>
+<p:notes xmlns:a="http://schemas.openxmlformats.org/drawingml/2006/main" xmlns:r="http://schemas.openxmlformats.org/officeDocument/2006/relationships" xmlns:p="http://schemas.openxmlformats.org/presentationml/2006/main">
+  <p:cSld>
+    <p:spTree>
+      <p:nvGrpSpPr>
+        <p:cNvPr id="1" name=""/>
+        <p:cNvGrpSpPr/>
+        <p:nvPr/>
+      </p:nvGrpSpPr>
+      <p:grpSpPr>
+        <a:xfrm>
+          <a:off x="0" y="0"/>
+          <a:ext cx="0" cy="0"/>
+          <a:chOff x="0" y="0"/>
+          <a:chExt cx="0" cy="0"/>
+        </a:xfrm>
+      </p:grpSpPr>
+      <p:sp>
+        <p:nvSpPr>
+          <p:cNvPr id="2" name="Slide Image Placeholder 1"/>
+          <p:cNvSpPr>
+            <a:spLocks noGrp="1" noRot="1" noChangeAspect="1"/>
+          </p:cNvSpPr>
+          <p:nvPr>
+            <p:ph type="sldImg" idx="2"/>
+          </p:nvPr>
+        </p:nvSpPr>
+        <p:spPr/>
+      </p:sp>
+      <p:sp>
+        <p:nvSpPr>
+          <p:cNvPr id="3" name="Notes Placeholder 2"/>
+          <p:cNvSpPr>
+            <a:spLocks noGrp="1"/>
+          </p:cNvSpPr>
+          <p:nvPr>
+            <p:ph type="body" sz="quarter" idx="3"/>
+          </p:nvPr>
+        </p:nvSpPr>
+        <p:spPr/>
+        <p:txBody>
+          <a:bodyPr/>
+          <a:lstStyle/>
+          <a:p>
+            <a:r>
+              <a:rPr dirty="0"/>
+              <a:t>Now let's look at our </a:t>
+            </a:r>
+            <a:r>
+              <a:rPr dirty="0" err="1"/>
+              <a:t>WorldID</a:t>
+            </a:r>
+            <a:r>
+              <a:rPr dirty="0"/>
+              <a:t> integration — our second sponsor technology.</a:t>
+            </a:r>
+          </a:p>
+          <a:p>
+            <a:endParaRPr dirty="0"/>
+          </a:p>
+          <a:p>
+            <a:r>
+              <a:rPr dirty="0"/>
+              <a:t>The flow has 4 steps.</a:t>
+            </a:r>
+          </a:p>
+          <a:p>
+            <a:endParaRPr dirty="0"/>
+          </a:p>
+          <a:p>
+            <a:r>
+              <a:rPr dirty="0"/>
+              <a:t>First, the investor opens </a:t>
+            </a:r>
+            <a:r>
+              <a:rPr dirty="0" err="1"/>
+              <a:t>RegShield</a:t>
+            </a:r>
+            <a:r>
+              <a:rPr dirty="0"/>
+              <a:t> in the World App and completes Orb-level ZK verification. This generates a zero-knowledge proof that proves they're a unique human without revealing their identity.</a:t>
+            </a:r>
+          </a:p>
+          <a:p>
+            <a:endParaRPr dirty="0"/>
+          </a:p>
+          <a:p>
+            <a:r>
+              <a:rPr dirty="0"/>
+              <a:t>Second, our backend API validates the proof via the </a:t>
+            </a:r>
+            <a:r>
+              <a:rPr dirty="0" err="1"/>
+              <a:t>Worldcoin</a:t>
+            </a:r>
+            <a:r>
+              <a:rPr dirty="0"/>
+              <a:t> cloud verification service. It returns a </a:t>
+            </a:r>
+            <a:r>
+              <a:rPr dirty="0" err="1"/>
+              <a:t>merkle</a:t>
+            </a:r>
+            <a:r>
+              <a:rPr dirty="0"/>
+              <a:t> root and nullifier hash.</a:t>
+            </a:r>
+          </a:p>
+          <a:p>
+            <a:endParaRPr dirty="0"/>
+          </a:p>
+          <a:p>
+            <a:r>
+              <a:rPr dirty="0"/>
+              <a:t>Third, our </a:t>
+            </a:r>
+            <a:r>
+              <a:rPr dirty="0" err="1"/>
+              <a:t>WorldIDVerifier</a:t>
+            </a:r>
+            <a:r>
+              <a:rPr dirty="0"/>
+              <a:t> smart contract — deployed at the address shown below — calls the World ID Router contract to verify the proof on-chain. It maps the wallet address as verified and stores the nullifier hash to prevent the same human from verifying twice.</a:t>
+            </a:r>
+          </a:p>
+          <a:p>
+            <a:endParaRPr dirty="0"/>
+          </a:p>
+          <a:p>
+            <a:r>
+              <a:rPr dirty="0"/>
+              <a:t>Fourth, our frontend has a </a:t>
+            </a:r>
+            <a:r>
+              <a:rPr dirty="0" err="1"/>
+              <a:t>useComplianceStatus</a:t>
+            </a:r>
+            <a:r>
+              <a:rPr dirty="0"/>
+              <a:t>() hook that checks </a:t>
+            </a:r>
+            <a:r>
+              <a:rPr dirty="0" err="1"/>
+              <a:t>isWorldIDVerified</a:t>
+            </a:r>
+            <a:r>
+              <a:rPr dirty="0"/>
+              <a:t>() before enabling any investment actions. If you're not </a:t>
+            </a:r>
+            <a:r>
+              <a:rPr dirty="0" err="1"/>
+              <a:t>WorldID</a:t>
+            </a:r>
+            <a:r>
+              <a:rPr dirty="0"/>
+              <a:t> verified, you simply cannot invest.</a:t>
+            </a:r>
+          </a:p>
+          <a:p>
+            <a:endParaRPr dirty="0"/>
+          </a:p>
+          <a:p>
+            <a:r>
+              <a:rPr dirty="0"/>
+              <a:t>The key function is </a:t>
+            </a:r>
+            <a:r>
+              <a:rPr dirty="0" err="1"/>
+              <a:t>verifyAndRegister</a:t>
+            </a:r>
+            <a:r>
+              <a:rPr dirty="0"/>
+              <a:t> — it takes the signal, root, nullifier hash, and proof, validates everything on-chain, and registers the user. The nullifier hash is the sybil resistance mechanism — same human, same nullifier, can't register twice.</a:t>
+            </a:r>
+          </a:p>
+        </p:txBody>
+      </p:sp>
+      <p:sp>
+        <p:nvSpPr>
+          <p:cNvPr id="4" name="Slide Number Placeholder 3"/>
+          <p:cNvSpPr>
+            <a:spLocks noGrp="1"/>
+          </p:cNvSpPr>
+          <p:nvPr>
+            <p:ph type="sldNum" sz="quarter" idx="5"/>
+          </p:nvPr>
+        </p:nvSpPr>
+        <p:spPr/>
+      </p:sp>
+    </p:spTree>
+  </p:cSld>
+  <p:clrMapOvr>
+    <a:masterClrMapping/>
+  </p:clrMapOvr>
+</p:notes>
+</file>
+
+<file path=ppt/notesSlides/notesSlide7.xml><?xml version="1.0" encoding="utf-8"?>
+<p:notes xmlns:a="http://schemas.openxmlformats.org/drawingml/2006/main" xmlns:r="http://schemas.openxmlformats.org/officeDocument/2006/relationships" xmlns:p="http://schemas.openxmlformats.org/presentationml/2006/main">
+  <p:cSld>
+    <p:spTree>
+      <p:nvGrpSpPr>
+        <p:cNvPr id="1" name=""/>
+        <p:cNvGrpSpPr/>
+        <p:nvPr/>
+      </p:nvGrpSpPr>
+      <p:grpSpPr>
+        <a:xfrm>
+          <a:off x="0" y="0"/>
+          <a:ext cx="0" cy="0"/>
+          <a:chOff x="0" y="0"/>
+          <a:chExt cx="0" cy="0"/>
+        </a:xfrm>
+      </p:grpSpPr>
+      <p:sp>
+        <p:nvSpPr>
+          <p:cNvPr id="2" name="Slide Image Placeholder 1"/>
+          <p:cNvSpPr>
+            <a:spLocks noGrp="1" noRot="1" noChangeAspect="1"/>
+          </p:cNvSpPr>
+          <p:nvPr>
+            <p:ph type="sldImg" idx="2"/>
+          </p:nvPr>
+        </p:nvSpPr>
+        <p:spPr/>
+      </p:sp>
+      <p:sp>
+        <p:nvSpPr>
+          <p:cNvPr id="3" name="Notes Placeholder 2"/>
+          <p:cNvSpPr>
+            <a:spLocks noGrp="1"/>
+          </p:cNvSpPr>
+          <p:nvPr>
+            <p:ph type="body" sz="quarter" idx="3"/>
+          </p:nvPr>
+        </p:nvSpPr>
+        <p:spPr/>
+        <p:txBody>
+          <a:bodyPr/>
+          <a:lstStyle/>
+          <a:p>
+            <a:r>
+              <a:t>Here's our three-layer architecture.</a:t>
+            </a:r>
+          </a:p>
+          <a:p>
+            <a:endParaRPr/>
+          </a:p>
+          <a:p>
+            <a:r>
+              <a:t>The Frontend is built with Next.js. We use Wagmi and Viem for wallet and contract interaction, Chainlink Price Feed hooks for live ETH/USD prices, WorldID MiniKit for identity verification, and custom ERC-3643 compliance status hooks. We have role-based dashboards for all four user types.</a:t>
+            </a:r>
+          </a:p>
+          <a:p>
+            <a:endParaRPr/>
+          </a:p>
+          <a:p>
+            <a:r>
+              <a:t>The Smart Contract layer has 34 contracts deployed on Sepolia. Key ones include VehicleNFT for the vehicle registry, PaymentEscrow for milestone-locked funds, the ERC-3643 token factories for AssetTokens and RevenueTokens, WorldIDVerifier for proof-of-personhood, and 5 CRE Receiver contracts that accept reports from the DON.</a:t>
+            </a:r>
+          </a:p>
+          <a:p>
+            <a:endParaRPr/>
+          </a:p>
+          <a:p>
+            <a:r>
+              <a:t>The Chainlink CRE layer is the off-chain compute. Our 5 TypeScript workflows compile to WASM and run on DON nodes with consensus aggregation. They can read on-chain state and call external APIs like NHTSA for VIN validation. They submit ABI-encoded reports back to the Receiver contracts.</a:t>
+            </a:r>
+          </a:p>
+          <a:p>
+            <a:endParaRPr/>
+          </a:p>
+          <a:p>
+            <a:r>
+              <a:t>The important thing to note — CRE replaces our backend cron jobs: campaignScheduler, bookingScheduler, and revenueSyncService. These were single points of failure. Now they run decentralized.</a:t>
+            </a:r>
+          </a:p>
+        </p:txBody>
+      </p:sp>
+      <p:sp>
+        <p:nvSpPr>
+          <p:cNvPr id="4" name="Slide Number Placeholder 3"/>
+          <p:cNvSpPr>
+            <a:spLocks noGrp="1"/>
+          </p:cNvSpPr>
+          <p:nvPr>
+            <p:ph type="sldNum" sz="quarter" idx="5"/>
+          </p:nvPr>
+        </p:nvSpPr>
+        <p:spPr/>
+      </p:sp>
+    </p:spTree>
+  </p:cSld>
+  <p:clrMapOvr>
+    <a:masterClrMapping/>
+  </p:clrMapOvr>
+</p:notes>
+</file>
+
+<file path=ppt/notesSlides/notesSlide8.xml><?xml version="1.0" encoding="utf-8"?>
+<p:notes xmlns:a="http://schemas.openxmlformats.org/drawingml/2006/main" xmlns:r="http://schemas.openxmlformats.org/officeDocument/2006/relationships" xmlns:p="http://schemas.openxmlformats.org/presentationml/2006/main">
+  <p:cSld>
+    <p:spTree>
+      <p:nvGrpSpPr>
+        <p:cNvPr id="1" name=""/>
+        <p:cNvGrpSpPr/>
+        <p:nvPr/>
+      </p:nvGrpSpPr>
+      <p:grpSpPr>
+        <a:xfrm>
+          <a:off x="0" y="0"/>
+          <a:ext cx="0" cy="0"/>
+          <a:chOff x="0" y="0"/>
+          <a:chExt cx="0" cy="0"/>
+        </a:xfrm>
+      </p:grpSpPr>
+      <p:sp>
+        <p:nvSpPr>
+          <p:cNvPr id="2" name="Slide Image Placeholder 1"/>
+          <p:cNvSpPr>
+            <a:spLocks noGrp="1" noRot="1" noChangeAspect="1"/>
+          </p:cNvSpPr>
+          <p:nvPr>
+            <p:ph type="sldImg" idx="2"/>
+          </p:nvPr>
+        </p:nvSpPr>
+        <p:spPr/>
+      </p:sp>
+      <p:sp>
+        <p:nvSpPr>
+          <p:cNvPr id="3" name="Notes Placeholder 2"/>
+          <p:cNvSpPr>
+            <a:spLocks noGrp="1"/>
+          </p:cNvSpPr>
+          <p:nvPr>
+            <p:ph type="body" sz="quarter" idx="3"/>
+          </p:nvPr>
+        </p:nvSpPr>
+        <p:spPr/>
+        <p:txBody>
+          <a:bodyPr/>
+          <a:lstStyle/>
+          <a:p>
+            <a:r>
+              <a:rPr dirty="0"/>
+              <a:t>We have 34 smart contracts deployed on </a:t>
+            </a:r>
+            <a:r>
+              <a:rPr dirty="0" err="1"/>
+              <a:t>Sepolia</a:t>
+            </a:r>
+            <a:r>
+              <a:rPr dirty="0"/>
+              <a:t>. Let me highlight the key ones.</a:t>
+            </a:r>
+          </a:p>
+          <a:p>
+            <a:endParaRPr dirty="0"/>
+          </a:p>
+          <a:p>
+            <a:r>
+              <a:rPr dirty="0"/>
+              <a:t>In the Identity and Compliance group — the </a:t>
+            </a:r>
+            <a:r>
+              <a:rPr dirty="0" err="1"/>
+              <a:t>IdentityRegistry</a:t>
+            </a:r>
+            <a:r>
+              <a:rPr dirty="0"/>
+              <a:t> is the ERC-3643 on-chain identity store. The </a:t>
+            </a:r>
+            <a:r>
+              <a:rPr dirty="0" err="1"/>
+              <a:t>WorldIDVerifier</a:t>
+            </a:r>
+            <a:r>
+              <a:rPr dirty="0"/>
+              <a:t> handles proof-of-personhood verification. </a:t>
+            </a:r>
+            <a:r>
+              <a:rPr dirty="0" err="1"/>
+              <a:t>ComplianceRules</a:t>
+            </a:r>
+            <a:r>
+              <a:rPr dirty="0"/>
+              <a:t> enforces transfer restrictions.</a:t>
+            </a:r>
+          </a:p>
+          <a:p>
+            <a:endParaRPr dirty="0"/>
+          </a:p>
+          <a:p>
+            <a:r>
+              <a:rPr dirty="0"/>
+              <a:t>In Tokens and Revenue — </a:t>
+            </a:r>
+            <a:r>
+              <a:rPr dirty="0" err="1"/>
+              <a:t>AssetTokenFactory</a:t>
+            </a:r>
+            <a:r>
+              <a:rPr dirty="0"/>
+              <a:t> and </a:t>
+            </a:r>
+            <a:r>
+              <a:rPr dirty="0" err="1"/>
+              <a:t>RevenueTokenFactory</a:t>
+            </a:r>
+            <a:r>
+              <a:rPr dirty="0"/>
+              <a:t> deploy ERC-3643 compliance tokens for each vehicle. The </a:t>
+            </a:r>
+            <a:r>
+              <a:rPr dirty="0" err="1"/>
+              <a:t>RevenueDistributor</a:t>
+            </a:r>
+            <a:r>
+              <a:rPr dirty="0"/>
+              <a:t> handles the waterfall distribution engine — it automatically splits rental revenue: 50% to investors, 10% to the operator.</a:t>
+            </a:r>
+          </a:p>
+          <a:p>
+            <a:endParaRPr dirty="0"/>
+          </a:p>
+          <a:p>
+            <a:r>
+              <a:rPr dirty="0"/>
+              <a:t>In Vehicle and Payments — </a:t>
+            </a:r>
+            <a:r>
+              <a:rPr dirty="0" err="1"/>
+              <a:t>VehicleNFT</a:t>
+            </a:r>
+            <a:r>
+              <a:rPr dirty="0"/>
+              <a:t> is our ERC-721 vehicle registry where each car is an NFT. </a:t>
+            </a:r>
+            <a:r>
+              <a:rPr dirty="0" err="1"/>
+              <a:t>InvestmentEscrow</a:t>
+            </a:r>
+            <a:r>
+              <a:rPr dirty="0"/>
+              <a:t> holds funds locked until milestones are verified. </a:t>
+            </a:r>
+            <a:r>
+              <a:rPr dirty="0" err="1"/>
+              <a:t>RentalPaymentProtocol</a:t>
+            </a:r>
+            <a:r>
+              <a:rPr dirty="0"/>
+              <a:t> processes rental payments.</a:t>
+            </a:r>
+          </a:p>
+          <a:p>
+            <a:endParaRPr dirty="0"/>
+          </a:p>
+          <a:p>
+            <a:r>
+              <a:rPr dirty="0"/>
+              <a:t>And our CRE Receivers — we have 5 Receiver contracts, one for each CRE workflow. </a:t>
+            </a:r>
+            <a:r>
+              <a:rPr dirty="0" err="1"/>
+              <a:t>OnboardingReceiver</a:t>
+            </a:r>
+            <a:r>
+              <a:rPr dirty="0"/>
+              <a:t> accepts identity verification reports, </a:t>
+            </a:r>
+            <a:r>
+              <a:rPr dirty="0" err="1"/>
+              <a:t>VehicleReceiver</a:t>
+            </a:r>
+            <a:r>
+              <a:rPr dirty="0"/>
+              <a:t> accepts telematics data, and </a:t>
+            </a:r>
+            <a:r>
+              <a:rPr dirty="0" err="1"/>
+              <a:t>PaymentReceiver</a:t>
+            </a:r>
+            <a:r>
+              <a:rPr dirty="0"/>
+              <a:t> accepts milestone completion reports. All of these are verified on </a:t>
+            </a:r>
+            <a:r>
+              <a:rPr dirty="0" err="1"/>
+              <a:t>Sepolia</a:t>
+            </a:r>
+            <a:r>
+              <a:rPr dirty="0"/>
+              <a:t> and use the </a:t>
+            </a:r>
+            <a:r>
+              <a:rPr dirty="0" err="1"/>
+              <a:t>MockKeystoneForwarder</a:t>
+            </a:r>
+            <a:r>
+              <a:rPr dirty="0"/>
+              <a:t> for simulation.</a:t>
+            </a:r>
+          </a:p>
+        </p:txBody>
+      </p:sp>
+      <p:sp>
+        <p:nvSpPr>
+          <p:cNvPr id="4" name="Slide Number Placeholder 3"/>
+          <p:cNvSpPr>
+            <a:spLocks noGrp="1"/>
+          </p:cNvSpPr>
+          <p:nvPr>
+            <p:ph type="sldNum" sz="quarter" idx="5"/>
+          </p:nvPr>
+        </p:nvSpPr>
+        <p:spPr/>
+      </p:sp>
+    </p:spTree>
+  </p:cSld>
+  <p:clrMapOvr>
+    <a:masterClrMapping/>
+  </p:clrMapOvr>
+</p:notes>
+</file>
+
+<file path=ppt/notesSlides/notesSlide9.xml><?xml version="1.0" encoding="utf-8"?>
+<p:notes xmlns:a="http://schemas.openxmlformats.org/drawingml/2006/main" xmlns:r="http://schemas.openxmlformats.org/officeDocument/2006/relationships" xmlns:p="http://schemas.openxmlformats.org/presentationml/2006/main">
+  <p:cSld>
+    <p:spTree>
+      <p:nvGrpSpPr>
+        <p:cNvPr id="1" name=""/>
+        <p:cNvGrpSpPr/>
+        <p:nvPr/>
+      </p:nvGrpSpPr>
+      <p:grpSpPr>
+        <a:xfrm>
+          <a:off x="0" y="0"/>
+          <a:ext cx="0" cy="0"/>
+          <a:chOff x="0" y="0"/>
+          <a:chExt cx="0" cy="0"/>
+        </a:xfrm>
+      </p:grpSpPr>
+      <p:sp>
+        <p:nvSpPr>
+          <p:cNvPr id="2" name="Slide Image Placeholder 1"/>
+          <p:cNvSpPr>
+            <a:spLocks noGrp="1" noRot="1" noChangeAspect="1"/>
+          </p:cNvSpPr>
+          <p:nvPr>
+            <p:ph type="sldImg" idx="2"/>
+          </p:nvPr>
+        </p:nvSpPr>
+        <p:spPr/>
+      </p:sp>
+      <p:sp>
+        <p:nvSpPr>
+          <p:cNvPr id="3" name="Notes Placeholder 2"/>
+          <p:cNvSpPr>
+            <a:spLocks noGrp="1"/>
+          </p:cNvSpPr>
+          <p:nvPr>
+            <p:ph type="body" sz="quarter" idx="3"/>
+          </p:nvPr>
+        </p:nvSpPr>
+        <p:spPr/>
+        <p:txBody>
+          <a:bodyPr/>
+          <a:lstStyle/>
+          <a:p>
+            <a:r>
+              <a:t>RegShield supports four user roles.</a:t>
+            </a:r>
+          </a:p>
+          <a:p>
+            <a:endParaRPr/>
+          </a:p>
+          <a:p>
+            <a:r>
+              <a:t>Investors can browse the vehicle marketplace, invest ETH into campaigns, and earn quarterly rental revenue. They must complete WorldID verification for sybil resistance and upload KYC documents which get registered on-chain via ERC-3643. Once verified, they receive AssetTokens and RevenueTokens.</a:t>
+            </a:r>
+          </a:p>
+          <a:p>
+            <a:endParaRPr/>
+          </a:p>
+          <a:p>
+            <a:r>
+              <a:t>Rentors — that's vehicle owners — can register their vehicles as ERC-721 NFTs, create fundraising campaigns to tokenize their vehicles, manage rental bookings, and earn a 10% operator fee on all revenue generated.</a:t>
+            </a:r>
+          </a:p>
+          <a:p>
+            <a:endParaRPr/>
+          </a:p>
+          <a:p>
+            <a:r>
+              <a:t>Renters can browse and filter available vehicles, book them with date selection, optionally verify with WorldID for trusted rentals, and leave reviews.</a:t>
+            </a:r>
+          </a:p>
+          <a:p>
+            <a:endParaRPr/>
+          </a:p>
+          <a:p>
+            <a:r>
+              <a:t>Admins review KYC submissions, monitor the CRE activity feed to see all automated actions, track milestone verification status, and manage disputes and refunds.</a:t>
+            </a:r>
+          </a:p>
+          <a:p>
+            <a:endParaRPr/>
+          </a:p>
+          <a:p>
+            <a:r>
+              <a:t>Each role has its own dedicated dashboard in the frontend with real-time data.</a:t>
+            </a:r>
+          </a:p>
+        </p:txBody>
+      </p:sp>
+      <p:sp>
+        <p:nvSpPr>
+          <p:cNvPr id="4" name="Slide Number Placeholder 3"/>
+          <p:cNvSpPr>
+            <a:spLocks noGrp="1"/>
+          </p:cNvSpPr>
+          <p:nvPr>
+            <p:ph type="sldNum" sz="quarter" idx="5"/>
+          </p:nvPr>
+        </p:nvSpPr>
+        <p:spPr/>
+      </p:sp>
+    </p:spTree>
+  </p:cSld>
+  <p:clrMapOvr>
+    <a:masterClrMapping/>
+  </p:clrMapOvr>
+</p:notes>
 </file>
 
 <file path=ppt/slideLayouts/slideLayout1.xml><?xml version="1.0" encoding="utf-8"?>
@@ -156,10 +1906,9 @@
           <a:lstStyle/>
           <a:p>
             <a:r>
-              <a:rPr lang="en-US" smtClean="0"/>
+              <a:rPr lang="en-US"/>
               <a:t>Click to edit Master title style</a:t>
             </a:r>
-            <a:endParaRPr lang="en-US"/>
           </a:p>
         </p:txBody>
       </p:sp>
@@ -275,10 +2024,9 @@
           </a:lstStyle>
           <a:p>
             <a:r>
-              <a:rPr lang="en-US" smtClean="0"/>
+              <a:rPr lang="en-US"/>
               <a:t>Click to edit Master subtitle style</a:t>
             </a:r>
-            <a:endParaRPr lang="en-US"/>
           </a:p>
         </p:txBody>
       </p:sp>
@@ -299,7 +2047,7 @@
           <a:p>
             <a:fld id="{5BCAD085-E8A6-8845-BD4E-CB4CCA059FC4}" type="datetimeFigureOut">
               <a:rPr lang="en-US" smtClean="0"/>
-              <a:t>1/27/13</a:t>
+              <a:t>3/5/26</a:t>
             </a:fld>
             <a:endParaRPr lang="en-US"/>
           </a:p>
@@ -393,10 +2141,9 @@
           <a:lstStyle/>
           <a:p>
             <a:r>
-              <a:rPr lang="en-US" smtClean="0"/>
+              <a:rPr lang="en-US"/>
               <a:t>Click to edit Master title style</a:t>
             </a:r>
-            <a:endParaRPr lang="en-US"/>
           </a:p>
         </p:txBody>
       </p:sp>
@@ -417,38 +2164,37 @@
           <a:p>
             <a:pPr lvl="0"/>
             <a:r>
-              <a:rPr lang="en-US" smtClean="0"/>
+              <a:rPr lang="en-US"/>
               <a:t>Click to edit Master text styles</a:t>
             </a:r>
           </a:p>
           <a:p>
             <a:pPr lvl="1"/>
             <a:r>
-              <a:rPr lang="en-US" smtClean="0"/>
+              <a:rPr lang="en-US"/>
               <a:t>Second level</a:t>
             </a:r>
           </a:p>
           <a:p>
             <a:pPr lvl="2"/>
             <a:r>
-              <a:rPr lang="en-US" smtClean="0"/>
+              <a:rPr lang="en-US"/>
               <a:t>Third level</a:t>
             </a:r>
           </a:p>
           <a:p>
             <a:pPr lvl="3"/>
             <a:r>
-              <a:rPr lang="en-US" smtClean="0"/>
+              <a:rPr lang="en-US"/>
               <a:t>Fourth level</a:t>
             </a:r>
           </a:p>
           <a:p>
             <a:pPr lvl="4"/>
             <a:r>
-              <a:rPr lang="en-US" smtClean="0"/>
+              <a:rPr lang="en-US"/>
               <a:t>Fifth level</a:t>
             </a:r>
-            <a:endParaRPr lang="en-US"/>
           </a:p>
         </p:txBody>
       </p:sp>
@@ -469,7 +2215,7 @@
           <a:p>
             <a:fld id="{5BCAD085-E8A6-8845-BD4E-CB4CCA059FC4}" type="datetimeFigureOut">
               <a:rPr lang="en-US" smtClean="0"/>
-              <a:t>1/27/13</a:t>
+              <a:t>3/5/26</a:t>
             </a:fld>
             <a:endParaRPr lang="en-US"/>
           </a:p>
@@ -568,10 +2314,9 @@
           <a:lstStyle/>
           <a:p>
             <a:r>
-              <a:rPr lang="en-US" smtClean="0"/>
+              <a:rPr lang="en-US"/>
               <a:t>Click to edit Master title style</a:t>
             </a:r>
-            <a:endParaRPr lang="en-US"/>
           </a:p>
         </p:txBody>
       </p:sp>
@@ -597,38 +2342,37 @@
           <a:p>
             <a:pPr lvl="0"/>
             <a:r>
-              <a:rPr lang="en-US" smtClean="0"/>
+              <a:rPr lang="en-US"/>
               <a:t>Click to edit Master text styles</a:t>
             </a:r>
           </a:p>
           <a:p>
             <a:pPr lvl="1"/>
             <a:r>
-              <a:rPr lang="en-US" smtClean="0"/>
+              <a:rPr lang="en-US"/>
               <a:t>Second level</a:t>
             </a:r>
           </a:p>
           <a:p>
             <a:pPr lvl="2"/>
             <a:r>
-              <a:rPr lang="en-US" smtClean="0"/>
+              <a:rPr lang="en-US"/>
               <a:t>Third level</a:t>
             </a:r>
           </a:p>
           <a:p>
             <a:pPr lvl="3"/>
             <a:r>
-              <a:rPr lang="en-US" smtClean="0"/>
+              <a:rPr lang="en-US"/>
               <a:t>Fourth level</a:t>
             </a:r>
           </a:p>
           <a:p>
             <a:pPr lvl="4"/>
             <a:r>
-              <a:rPr lang="en-US" smtClean="0"/>
+              <a:rPr lang="en-US"/>
               <a:t>Fifth level</a:t>
             </a:r>
-            <a:endParaRPr lang="en-US"/>
           </a:p>
         </p:txBody>
       </p:sp>
@@ -649,7 +2393,7 @@
           <a:p>
             <a:fld id="{5BCAD085-E8A6-8845-BD4E-CB4CCA059FC4}" type="datetimeFigureOut">
               <a:rPr lang="en-US" smtClean="0"/>
-              <a:t>1/27/13</a:t>
+              <a:t>3/5/26</a:t>
             </a:fld>
             <a:endParaRPr lang="en-US"/>
           </a:p>
@@ -743,10 +2487,9 @@
           <a:lstStyle/>
           <a:p>
             <a:r>
-              <a:rPr lang="en-US" smtClean="0"/>
+              <a:rPr lang="en-US"/>
               <a:t>Click to edit Master title style</a:t>
             </a:r>
-            <a:endParaRPr lang="en-US"/>
           </a:p>
         </p:txBody>
       </p:sp>
@@ -767,38 +2510,37 @@
           <a:p>
             <a:pPr lvl="0"/>
             <a:r>
-              <a:rPr lang="en-US" smtClean="0"/>
+              <a:rPr lang="en-US"/>
               <a:t>Click to edit Master text styles</a:t>
             </a:r>
           </a:p>
           <a:p>
             <a:pPr lvl="1"/>
             <a:r>
-              <a:rPr lang="en-US" smtClean="0"/>
+              <a:rPr lang="en-US"/>
               <a:t>Second level</a:t>
             </a:r>
           </a:p>
           <a:p>
             <a:pPr lvl="2"/>
             <a:r>
-              <a:rPr lang="en-US" smtClean="0"/>
+              <a:rPr lang="en-US"/>
               <a:t>Third level</a:t>
             </a:r>
           </a:p>
           <a:p>
             <a:pPr lvl="3"/>
             <a:r>
-              <a:rPr lang="en-US" smtClean="0"/>
+              <a:rPr lang="en-US"/>
               <a:t>Fourth level</a:t>
             </a:r>
           </a:p>
           <a:p>
             <a:pPr lvl="4"/>
             <a:r>
-              <a:rPr lang="en-US" smtClean="0"/>
+              <a:rPr lang="en-US"/>
               <a:t>Fifth level</a:t>
             </a:r>
-            <a:endParaRPr lang="en-US"/>
           </a:p>
         </p:txBody>
       </p:sp>
@@ -819,7 +2561,7 @@
           <a:p>
             <a:fld id="{5BCAD085-E8A6-8845-BD4E-CB4CCA059FC4}" type="datetimeFigureOut">
               <a:rPr lang="en-US" smtClean="0"/>
-              <a:t>1/27/13</a:t>
+              <a:t>3/5/26</a:t>
             </a:fld>
             <a:endParaRPr lang="en-US"/>
           </a:p>
@@ -922,10 +2664,9 @@
           </a:lstStyle>
           <a:p>
             <a:r>
-              <a:rPr lang="en-US" smtClean="0"/>
+              <a:rPr lang="en-US"/>
               <a:t>Click to edit Master title style</a:t>
             </a:r>
-            <a:endParaRPr lang="en-US"/>
           </a:p>
         </p:txBody>
       </p:sp>
@@ -1042,7 +2783,7 @@
           <a:p>
             <a:pPr lvl="0"/>
             <a:r>
-              <a:rPr lang="en-US" smtClean="0"/>
+              <a:rPr lang="en-US"/>
               <a:t>Click to edit Master text styles</a:t>
             </a:r>
           </a:p>
@@ -1065,7 +2806,7 @@
           <a:p>
             <a:fld id="{5BCAD085-E8A6-8845-BD4E-CB4CCA059FC4}" type="datetimeFigureOut">
               <a:rPr lang="en-US" smtClean="0"/>
-              <a:t>1/27/13</a:t>
+              <a:t>3/5/26</a:t>
             </a:fld>
             <a:endParaRPr lang="en-US"/>
           </a:p>
@@ -1159,10 +2900,9 @@
           <a:lstStyle/>
           <a:p>
             <a:r>
-              <a:rPr lang="en-US" smtClean="0"/>
+              <a:rPr lang="en-US"/>
               <a:t>Click to edit Master title style</a:t>
             </a:r>
-            <a:endParaRPr lang="en-US"/>
           </a:p>
         </p:txBody>
       </p:sp>
@@ -1216,38 +2956,37 @@
           <a:p>
             <a:pPr lvl="0"/>
             <a:r>
-              <a:rPr lang="en-US" smtClean="0"/>
+              <a:rPr lang="en-US"/>
               <a:t>Click to edit Master text styles</a:t>
             </a:r>
           </a:p>
           <a:p>
             <a:pPr lvl="1"/>
             <a:r>
-              <a:rPr lang="en-US" smtClean="0"/>
+              <a:rPr lang="en-US"/>
               <a:t>Second level</a:t>
             </a:r>
           </a:p>
           <a:p>
             <a:pPr lvl="2"/>
             <a:r>
-              <a:rPr lang="en-US" smtClean="0"/>
+              <a:rPr lang="en-US"/>
               <a:t>Third level</a:t>
             </a:r>
           </a:p>
           <a:p>
             <a:pPr lvl="3"/>
             <a:r>
-              <a:rPr lang="en-US" smtClean="0"/>
+              <a:rPr lang="en-US"/>
               <a:t>Fourth level</a:t>
             </a:r>
           </a:p>
           <a:p>
             <a:pPr lvl="4"/>
             <a:r>
-              <a:rPr lang="en-US" smtClean="0"/>
+              <a:rPr lang="en-US"/>
               <a:t>Fifth level</a:t>
             </a:r>
-            <a:endParaRPr lang="en-US"/>
           </a:p>
         </p:txBody>
       </p:sp>
@@ -1301,38 +3040,37 @@
           <a:p>
             <a:pPr lvl="0"/>
             <a:r>
-              <a:rPr lang="en-US" smtClean="0"/>
+              <a:rPr lang="en-US"/>
               <a:t>Click to edit Master text styles</a:t>
             </a:r>
           </a:p>
           <a:p>
             <a:pPr lvl="1"/>
             <a:r>
-              <a:rPr lang="en-US" smtClean="0"/>
+              <a:rPr lang="en-US"/>
               <a:t>Second level</a:t>
             </a:r>
           </a:p>
           <a:p>
             <a:pPr lvl="2"/>
             <a:r>
-              <a:rPr lang="en-US" smtClean="0"/>
+              <a:rPr lang="en-US"/>
               <a:t>Third level</a:t>
             </a:r>
           </a:p>
           <a:p>
             <a:pPr lvl="3"/>
             <a:r>
-              <a:rPr lang="en-US" smtClean="0"/>
+              <a:rPr lang="en-US"/>
               <a:t>Fourth level</a:t>
             </a:r>
           </a:p>
           <a:p>
             <a:pPr lvl="4"/>
             <a:r>
-              <a:rPr lang="en-US" smtClean="0"/>
+              <a:rPr lang="en-US"/>
               <a:t>Fifth level</a:t>
             </a:r>
-            <a:endParaRPr lang="en-US"/>
           </a:p>
         </p:txBody>
       </p:sp>
@@ -1353,7 +3091,7 @@
           <a:p>
             <a:fld id="{5BCAD085-E8A6-8845-BD4E-CB4CCA059FC4}" type="datetimeFigureOut">
               <a:rPr lang="en-US" smtClean="0"/>
-              <a:t>1/27/13</a:t>
+              <a:t>3/5/26</a:t>
             </a:fld>
             <a:endParaRPr lang="en-US"/>
           </a:p>
@@ -1451,10 +3189,9 @@
           </a:lstStyle>
           <a:p>
             <a:r>
-              <a:rPr lang="en-US" smtClean="0"/>
+              <a:rPr lang="en-US"/>
               <a:t>Click to edit Master title style</a:t>
             </a:r>
-            <a:endParaRPr lang="en-US"/>
           </a:p>
         </p:txBody>
       </p:sp>
@@ -1517,7 +3254,7 @@
           <a:p>
             <a:pPr lvl="0"/>
             <a:r>
-              <a:rPr lang="en-US" smtClean="0"/>
+              <a:rPr lang="en-US"/>
               <a:t>Click to edit Master text styles</a:t>
             </a:r>
           </a:p>
@@ -1573,38 +3310,37 @@
           <a:p>
             <a:pPr lvl="0"/>
             <a:r>
-              <a:rPr lang="en-US" smtClean="0"/>
+              <a:rPr lang="en-US"/>
               <a:t>Click to edit Master text styles</a:t>
             </a:r>
           </a:p>
           <a:p>
             <a:pPr lvl="1"/>
             <a:r>
-              <a:rPr lang="en-US" smtClean="0"/>
+              <a:rPr lang="en-US"/>
               <a:t>Second level</a:t>
             </a:r>
           </a:p>
           <a:p>
             <a:pPr lvl="2"/>
             <a:r>
-              <a:rPr lang="en-US" smtClean="0"/>
+              <a:rPr lang="en-US"/>
               <a:t>Third level</a:t>
             </a:r>
           </a:p>
           <a:p>
             <a:pPr lvl="3"/>
             <a:r>
-              <a:rPr lang="en-US" smtClean="0"/>
+              <a:rPr lang="en-US"/>
               <a:t>Fourth level</a:t>
             </a:r>
           </a:p>
           <a:p>
             <a:pPr lvl="4"/>
             <a:r>
-              <a:rPr lang="en-US" smtClean="0"/>
+              <a:rPr lang="en-US"/>
               <a:t>Fifth level</a:t>
             </a:r>
-            <a:endParaRPr lang="en-US"/>
           </a:p>
         </p:txBody>
       </p:sp>
@@ -1667,7 +3403,7 @@
           <a:p>
             <a:pPr lvl="0"/>
             <a:r>
-              <a:rPr lang="en-US" smtClean="0"/>
+              <a:rPr lang="en-US"/>
               <a:t>Click to edit Master text styles</a:t>
             </a:r>
           </a:p>
@@ -1723,38 +3459,37 @@
           <a:p>
             <a:pPr lvl="0"/>
             <a:r>
-              <a:rPr lang="en-US" smtClean="0"/>
+              <a:rPr lang="en-US"/>
               <a:t>Click to edit Master text styles</a:t>
             </a:r>
           </a:p>
           <a:p>
             <a:pPr lvl="1"/>
             <a:r>
-              <a:rPr lang="en-US" smtClean="0"/>
+              <a:rPr lang="en-US"/>
               <a:t>Second level</a:t>
             </a:r>
           </a:p>
           <a:p>
             <a:pPr lvl="2"/>
             <a:r>
-              <a:rPr lang="en-US" smtClean="0"/>
+              <a:rPr lang="en-US"/>
               <a:t>Third level</a:t>
             </a:r>
           </a:p>
           <a:p>
             <a:pPr lvl="3"/>
             <a:r>
-              <a:rPr lang="en-US" smtClean="0"/>
+              <a:rPr lang="en-US"/>
               <a:t>Fourth level</a:t>
             </a:r>
           </a:p>
           <a:p>
             <a:pPr lvl="4"/>
             <a:r>
-              <a:rPr lang="en-US" smtClean="0"/>
+              <a:rPr lang="en-US"/>
               <a:t>Fifth level</a:t>
             </a:r>
-            <a:endParaRPr lang="en-US"/>
           </a:p>
         </p:txBody>
       </p:sp>
@@ -1775,7 +3510,7 @@
           <a:p>
             <a:fld id="{5BCAD085-E8A6-8845-BD4E-CB4CCA059FC4}" type="datetimeFigureOut">
               <a:rPr lang="en-US" smtClean="0"/>
-              <a:t>1/27/13</a:t>
+              <a:t>3/5/26</a:t>
             </a:fld>
             <a:endParaRPr lang="en-US"/>
           </a:p>
@@ -1869,10 +3604,9 @@
           <a:lstStyle/>
           <a:p>
             <a:r>
-              <a:rPr lang="en-US" smtClean="0"/>
+              <a:rPr lang="en-US"/>
               <a:t>Click to edit Master title style</a:t>
             </a:r>
-            <a:endParaRPr lang="en-US"/>
           </a:p>
         </p:txBody>
       </p:sp>
@@ -1893,7 +3627,7 @@
           <a:p>
             <a:fld id="{5BCAD085-E8A6-8845-BD4E-CB4CCA059FC4}" type="datetimeFigureOut">
               <a:rPr lang="en-US" smtClean="0"/>
-              <a:t>1/27/13</a:t>
+              <a:t>3/5/26</a:t>
             </a:fld>
             <a:endParaRPr lang="en-US"/>
           </a:p>
@@ -1988,7 +3722,7 @@
           <a:p>
             <a:fld id="{5BCAD085-E8A6-8845-BD4E-CB4CCA059FC4}" type="datetimeFigureOut">
               <a:rPr lang="en-US" smtClean="0"/>
-              <a:t>1/27/13</a:t>
+              <a:t>3/5/26</a:t>
             </a:fld>
             <a:endParaRPr lang="en-US"/>
           </a:p>
@@ -2091,10 +3825,9 @@
           </a:lstStyle>
           <a:p>
             <a:r>
-              <a:rPr lang="en-US" smtClean="0"/>
+              <a:rPr lang="en-US"/>
               <a:t>Click to edit Master title style</a:t>
             </a:r>
-            <a:endParaRPr lang="en-US"/>
           </a:p>
         </p:txBody>
       </p:sp>
@@ -2148,38 +3881,37 @@
           <a:p>
             <a:pPr lvl="0"/>
             <a:r>
-              <a:rPr lang="en-US" smtClean="0"/>
+              <a:rPr lang="en-US"/>
               <a:t>Click to edit Master text styles</a:t>
             </a:r>
           </a:p>
           <a:p>
             <a:pPr lvl="1"/>
             <a:r>
-              <a:rPr lang="en-US" smtClean="0"/>
+              <a:rPr lang="en-US"/>
               <a:t>Second level</a:t>
             </a:r>
           </a:p>
           <a:p>
             <a:pPr lvl="2"/>
             <a:r>
-              <a:rPr lang="en-US" smtClean="0"/>
+              <a:rPr lang="en-US"/>
               <a:t>Third level</a:t>
             </a:r>
           </a:p>
           <a:p>
             <a:pPr lvl="3"/>
             <a:r>
-              <a:rPr lang="en-US" smtClean="0"/>
+              <a:rPr lang="en-US"/>
               <a:t>Fourth level</a:t>
             </a:r>
           </a:p>
           <a:p>
             <a:pPr lvl="4"/>
             <a:r>
-              <a:rPr lang="en-US" smtClean="0"/>
+              <a:rPr lang="en-US"/>
               <a:t>Fifth level</a:t>
             </a:r>
-            <a:endParaRPr lang="en-US"/>
           </a:p>
         </p:txBody>
       </p:sp>
@@ -2242,7 +3974,7 @@
           <a:p>
             <a:pPr lvl="0"/>
             <a:r>
-              <a:rPr lang="en-US" smtClean="0"/>
+              <a:rPr lang="en-US"/>
               <a:t>Click to edit Master text styles</a:t>
             </a:r>
           </a:p>
@@ -2265,7 +3997,7 @@
           <a:p>
             <a:fld id="{5BCAD085-E8A6-8845-BD4E-CB4CCA059FC4}" type="datetimeFigureOut">
               <a:rPr lang="en-US" smtClean="0"/>
-              <a:t>1/27/13</a:t>
+              <a:t>3/5/26</a:t>
             </a:fld>
             <a:endParaRPr lang="en-US"/>
           </a:p>
@@ -2368,10 +4100,9 @@
           </a:lstStyle>
           <a:p>
             <a:r>
-              <a:rPr lang="en-US" smtClean="0"/>
+              <a:rPr lang="en-US"/>
               <a:t>Click to edit Master title style</a:t>
             </a:r>
-            <a:endParaRPr lang="en-US"/>
           </a:p>
         </p:txBody>
       </p:sp>
@@ -2495,7 +4226,7 @@
           <a:p>
             <a:pPr lvl="0"/>
             <a:r>
-              <a:rPr lang="en-US" smtClean="0"/>
+              <a:rPr lang="en-US"/>
               <a:t>Click to edit Master text styles</a:t>
             </a:r>
           </a:p>
@@ -2518,7 +4249,7 @@
           <a:p>
             <a:fld id="{5BCAD085-E8A6-8845-BD4E-CB4CCA059FC4}" type="datetimeFigureOut">
               <a:rPr lang="en-US" smtClean="0"/>
-              <a:t>1/27/13</a:t>
+              <a:t>3/5/26</a:t>
             </a:fld>
             <a:endParaRPr lang="en-US"/>
           </a:p>
@@ -2627,10 +4358,9 @@
           <a:lstStyle/>
           <a:p>
             <a:r>
-              <a:rPr lang="en-US" smtClean="0"/>
+              <a:rPr lang="en-US"/>
               <a:t>Click to edit Master title style</a:t>
             </a:r>
-            <a:endParaRPr lang="en-US"/>
           </a:p>
         </p:txBody>
       </p:sp>
@@ -2661,38 +4391,37 @@
           <a:p>
             <a:pPr lvl="0"/>
             <a:r>
-              <a:rPr lang="en-US" smtClean="0"/>
+              <a:rPr lang="en-US"/>
               <a:t>Click to edit Master text styles</a:t>
             </a:r>
           </a:p>
           <a:p>
             <a:pPr lvl="1"/>
             <a:r>
-              <a:rPr lang="en-US" smtClean="0"/>
+              <a:rPr lang="en-US"/>
               <a:t>Second level</a:t>
             </a:r>
           </a:p>
           <a:p>
             <a:pPr lvl="2"/>
             <a:r>
-              <a:rPr lang="en-US" smtClean="0"/>
+              <a:rPr lang="en-US"/>
               <a:t>Third level</a:t>
             </a:r>
           </a:p>
           <a:p>
             <a:pPr lvl="3"/>
             <a:r>
-              <a:rPr lang="en-US" smtClean="0"/>
+              <a:rPr lang="en-US"/>
               <a:t>Fourth level</a:t>
             </a:r>
           </a:p>
           <a:p>
             <a:pPr lvl="4"/>
             <a:r>
-              <a:rPr lang="en-US" smtClean="0"/>
+              <a:rPr lang="en-US"/>
               <a:t>Fifth level</a:t>
             </a:r>
-            <a:endParaRPr lang="en-US"/>
           </a:p>
         </p:txBody>
       </p:sp>
@@ -2731,7 +4460,7 @@
           <a:p>
             <a:fld id="{5BCAD085-E8A6-8845-BD4E-CB4CCA059FC4}" type="datetimeFigureOut">
               <a:rPr lang="en-US" smtClean="0"/>
-              <a:t>1/27/13</a:t>
+              <a:t>3/5/26</a:t>
             </a:fld>
             <a:endParaRPr lang="en-US"/>
           </a:p>
@@ -3090,7 +4819,7 @@
 </file>
 
 <file path=ppt/slides/slide1.xml><?xml version="1.0" encoding="utf-8"?>
-<p:sld xmlns:a="http://schemas.openxmlformats.org/drawingml/2006/main" xmlns:p="http://schemas.openxmlformats.org/presentationml/2006/main" xmlns:r="http://schemas.openxmlformats.org/officeDocument/2006/relationships">
+<p:sld xmlns:a="http://schemas.openxmlformats.org/drawingml/2006/main" xmlns:r="http://schemas.openxmlformats.org/officeDocument/2006/relationships" xmlns:p="http://schemas.openxmlformats.org/presentationml/2006/main">
   <p:cSld>
     <p:bg>
       <p:bgPr>
@@ -3106,7 +4835,14 @@
         <p:cNvGrpSpPr/>
         <p:nvPr/>
       </p:nvGrpSpPr>
-      <p:grpSpPr/>
+      <p:grpSpPr>
+        <a:xfrm>
+          <a:off x="0" y="0"/>
+          <a:ext cx="0" cy="0"/>
+          <a:chOff x="0" y="0"/>
+          <a:chExt cx="0" cy="0"/>
+        </a:xfrm>
+      </p:grpSpPr>
       <p:sp>
         <p:nvSpPr>
           <p:cNvPr id="2" name="Rectangle 1"/>
@@ -3147,6 +4883,7 @@
           <a:lstStyle/>
           <a:p>
             <a:pPr algn="ctr"/>
+            <a:endParaRPr/>
           </a:p>
         </p:txBody>
       </p:sp>
@@ -3296,7 +5033,7 @@
           </a:fontRef>
         </p:style>
         <p:txBody>
-          <a:bodyPr rtlCol="0" anchor="ctr" wrap="none"/>
+          <a:bodyPr wrap="none" rtlCol="0" anchor="ctr"/>
           <a:lstStyle/>
           <a:p>
             <a:pPr algn="ctr">
@@ -3354,7 +5091,7 @@
           </a:fontRef>
         </p:style>
         <p:txBody>
-          <a:bodyPr rtlCol="0" anchor="ctr" wrap="none"/>
+          <a:bodyPr wrap="none" rtlCol="0" anchor="ctr"/>
           <a:lstStyle/>
           <a:p>
             <a:pPr algn="ctr">
@@ -3412,7 +5149,7 @@
           </a:fontRef>
         </p:style>
         <p:txBody>
-          <a:bodyPr rtlCol="0" anchor="ctr" wrap="none"/>
+          <a:bodyPr wrap="none" rtlCol="0" anchor="ctr"/>
           <a:lstStyle/>
           <a:p>
             <a:pPr algn="ctr">
@@ -3513,7 +5250,7 @@
 </file>
 
 <file path=ppt/slides/slide10.xml><?xml version="1.0" encoding="utf-8"?>
-<p:sld xmlns:a="http://schemas.openxmlformats.org/drawingml/2006/main" xmlns:p="http://schemas.openxmlformats.org/presentationml/2006/main" xmlns:r="http://schemas.openxmlformats.org/officeDocument/2006/relationships">
+<p:sld xmlns:a="http://schemas.openxmlformats.org/drawingml/2006/main" xmlns:r="http://schemas.openxmlformats.org/officeDocument/2006/relationships" xmlns:p="http://schemas.openxmlformats.org/presentationml/2006/main">
   <p:cSld>
     <p:bg>
       <p:bgPr>
@@ -3529,7 +5266,14 @@
         <p:cNvGrpSpPr/>
         <p:nvPr/>
       </p:nvGrpSpPr>
-      <p:grpSpPr/>
+      <p:grpSpPr>
+        <a:xfrm>
+          <a:off x="0" y="0"/>
+          <a:ext cx="0" cy="0"/>
+          <a:chOff x="0" y="0"/>
+          <a:chExt cx="0" cy="0"/>
+        </a:xfrm>
+      </p:grpSpPr>
       <p:sp>
         <p:nvSpPr>
           <p:cNvPr id="2" name="TextBox 1"/>
@@ -3644,6 +5388,7 @@
           <a:lstStyle/>
           <a:p>
             <a:pPr algn="ctr"/>
+            <a:endParaRPr/>
           </a:p>
         </p:txBody>
       </p:sp>
@@ -3797,6 +5542,7 @@
           <a:lstStyle/>
           <a:p>
             <a:pPr algn="ctr"/>
+            <a:endParaRPr/>
           </a:p>
         </p:txBody>
       </p:sp>
@@ -3950,6 +5696,7 @@
           <a:lstStyle/>
           <a:p>
             <a:pPr algn="ctr"/>
+            <a:endParaRPr/>
           </a:p>
         </p:txBody>
       </p:sp>
@@ -4103,6 +5850,7 @@
           <a:lstStyle/>
           <a:p>
             <a:pPr algn="ctr"/>
+            <a:endParaRPr/>
           </a:p>
         </p:txBody>
       </p:sp>
@@ -4256,6 +6004,7 @@
           <a:lstStyle/>
           <a:p>
             <a:pPr algn="ctr"/>
+            <a:endParaRPr/>
           </a:p>
         </p:txBody>
       </p:sp>
@@ -4700,7 +6449,7 @@
 </file>
 
 <file path=ppt/slides/slide11.xml><?xml version="1.0" encoding="utf-8"?>
-<p:sld xmlns:a="http://schemas.openxmlformats.org/drawingml/2006/main" xmlns:p="http://schemas.openxmlformats.org/presentationml/2006/main" xmlns:r="http://schemas.openxmlformats.org/officeDocument/2006/relationships">
+<p:sld xmlns:a="http://schemas.openxmlformats.org/drawingml/2006/main" xmlns:r="http://schemas.openxmlformats.org/officeDocument/2006/relationships" xmlns:p="http://schemas.openxmlformats.org/presentationml/2006/main">
   <p:cSld>
     <p:bg>
       <p:bgPr>
@@ -4716,7 +6465,14 @@
         <p:cNvGrpSpPr/>
         <p:nvPr/>
       </p:nvGrpSpPr>
-      <p:grpSpPr/>
+      <p:grpSpPr>
+        <a:xfrm>
+          <a:off x="0" y="0"/>
+          <a:ext cx="0" cy="0"/>
+          <a:chOff x="0" y="0"/>
+          <a:chExt cx="0" cy="0"/>
+        </a:xfrm>
+      </p:grpSpPr>
       <p:sp>
         <p:nvSpPr>
           <p:cNvPr id="2" name="TextBox 1"/>
@@ -4795,6 +6551,7 @@
           <a:lstStyle/>
           <a:p>
             <a:pPr algn="ctr"/>
+            <a:endParaRPr/>
           </a:p>
         </p:txBody>
       </p:sp>
@@ -4838,6 +6595,7 @@
           <a:lstStyle/>
           <a:p>
             <a:pPr algn="ctr"/>
+            <a:endParaRPr/>
           </a:p>
         </p:txBody>
       </p:sp>
@@ -5099,6 +6857,7 @@
           <a:lstStyle/>
           <a:p>
             <a:pPr algn="ctr"/>
+            <a:endParaRPr/>
           </a:p>
         </p:txBody>
       </p:sp>
@@ -5142,6 +6901,7 @@
           <a:lstStyle/>
           <a:p>
             <a:pPr algn="ctr"/>
+            <a:endParaRPr/>
           </a:p>
         </p:txBody>
       </p:sp>
@@ -5403,6 +7163,7 @@
           <a:lstStyle/>
           <a:p>
             <a:pPr algn="ctr"/>
+            <a:endParaRPr/>
           </a:p>
         </p:txBody>
       </p:sp>
@@ -5446,6 +7207,7 @@
           <a:lstStyle/>
           <a:p>
             <a:pPr algn="ctr"/>
+            <a:endParaRPr/>
           </a:p>
         </p:txBody>
       </p:sp>
@@ -5707,6 +7469,7 @@
           <a:lstStyle/>
           <a:p>
             <a:pPr algn="ctr"/>
+            <a:endParaRPr/>
           </a:p>
         </p:txBody>
       </p:sp>
@@ -5750,6 +7513,7 @@
           <a:lstStyle/>
           <a:p>
             <a:pPr algn="ctr"/>
+            <a:endParaRPr/>
           </a:p>
         </p:txBody>
       </p:sp>
@@ -6011,6 +7775,7 @@
           <a:lstStyle/>
           <a:p>
             <a:pPr algn="ctr"/>
+            <a:endParaRPr/>
           </a:p>
         </p:txBody>
       </p:sp>
@@ -6054,6 +7819,7 @@
           <a:lstStyle/>
           <a:p>
             <a:pPr algn="ctr"/>
+            <a:endParaRPr/>
           </a:p>
         </p:txBody>
       </p:sp>
@@ -6318,7 +8084,7 @@
 </file>
 
 <file path=ppt/slides/slide12.xml><?xml version="1.0" encoding="utf-8"?>
-<p:sld xmlns:a="http://schemas.openxmlformats.org/drawingml/2006/main" xmlns:p="http://schemas.openxmlformats.org/presentationml/2006/main" xmlns:r="http://schemas.openxmlformats.org/officeDocument/2006/relationships">
+<p:sld xmlns:a="http://schemas.openxmlformats.org/drawingml/2006/main" xmlns:r="http://schemas.openxmlformats.org/officeDocument/2006/relationships" xmlns:p="http://schemas.openxmlformats.org/presentationml/2006/main">
   <p:cSld>
     <p:bg>
       <p:bgPr>
@@ -6334,7 +8100,14 @@
         <p:cNvGrpSpPr/>
         <p:nvPr/>
       </p:nvGrpSpPr>
-      <p:grpSpPr/>
+      <p:grpSpPr>
+        <a:xfrm>
+          <a:off x="0" y="0"/>
+          <a:ext cx="0" cy="0"/>
+          <a:chOff x="0" y="0"/>
+          <a:chExt cx="0" cy="0"/>
+        </a:xfrm>
+      </p:grpSpPr>
       <p:sp>
         <p:nvSpPr>
           <p:cNvPr id="2" name="Rectangle 1"/>
@@ -6375,6 +8148,7 @@
           <a:lstStyle/>
           <a:p>
             <a:pPr algn="ctr"/>
+            <a:endParaRPr/>
           </a:p>
         </p:txBody>
       </p:sp>
@@ -6832,7 +8606,7 @@
 </file>
 
 <file path=ppt/slides/slide2.xml><?xml version="1.0" encoding="utf-8"?>
-<p:sld xmlns:a="http://schemas.openxmlformats.org/drawingml/2006/main" xmlns:p="http://schemas.openxmlformats.org/presentationml/2006/main" xmlns:r="http://schemas.openxmlformats.org/officeDocument/2006/relationships">
+<p:sld xmlns:a="http://schemas.openxmlformats.org/drawingml/2006/main" xmlns:r="http://schemas.openxmlformats.org/officeDocument/2006/relationships" xmlns:p="http://schemas.openxmlformats.org/presentationml/2006/main">
   <p:cSld>
     <p:bg>
       <p:bgPr>
@@ -6848,7 +8622,14 @@
         <p:cNvGrpSpPr/>
         <p:nvPr/>
       </p:nvGrpSpPr>
-      <p:grpSpPr/>
+      <p:grpSpPr>
+        <a:xfrm>
+          <a:off x="0" y="0"/>
+          <a:ext cx="0" cy="0"/>
+          <a:chOff x="0" y="0"/>
+          <a:chExt cx="0" cy="0"/>
+        </a:xfrm>
+      </p:grpSpPr>
       <p:sp>
         <p:nvSpPr>
           <p:cNvPr id="2" name="TextBox 1"/>
@@ -6927,6 +8708,7 @@
           <a:lstStyle/>
           <a:p>
             <a:pPr algn="ctr"/>
+            <a:endParaRPr/>
           </a:p>
         </p:txBody>
       </p:sp>
@@ -6970,6 +8752,7 @@
           <a:lstStyle/>
           <a:p>
             <a:pPr algn="ctr"/>
+            <a:endParaRPr/>
           </a:p>
         </p:txBody>
       </p:sp>
@@ -7159,6 +8942,7 @@
           <a:lstStyle/>
           <a:p>
             <a:pPr algn="ctr"/>
+            <a:endParaRPr/>
           </a:p>
         </p:txBody>
       </p:sp>
@@ -7202,6 +8986,7 @@
           <a:lstStyle/>
           <a:p>
             <a:pPr algn="ctr"/>
+            <a:endParaRPr/>
           </a:p>
         </p:txBody>
       </p:sp>
@@ -7391,6 +9176,7 @@
           <a:lstStyle/>
           <a:p>
             <a:pPr algn="ctr"/>
+            <a:endParaRPr/>
           </a:p>
         </p:txBody>
       </p:sp>
@@ -7434,6 +9220,7 @@
           <a:lstStyle/>
           <a:p>
             <a:pPr algn="ctr"/>
+            <a:endParaRPr/>
           </a:p>
         </p:txBody>
       </p:sp>
@@ -7623,6 +9410,7 @@
           <a:lstStyle/>
           <a:p>
             <a:pPr algn="ctr"/>
+            <a:endParaRPr/>
           </a:p>
         </p:txBody>
       </p:sp>
@@ -7666,6 +9454,7 @@
           <a:lstStyle/>
           <a:p>
             <a:pPr algn="ctr"/>
+            <a:endParaRPr/>
           </a:p>
         </p:txBody>
       </p:sp>
@@ -7858,7 +9647,7 @@
 </file>
 
 <file path=ppt/slides/slide3.xml><?xml version="1.0" encoding="utf-8"?>
-<p:sld xmlns:a="http://schemas.openxmlformats.org/drawingml/2006/main" xmlns:p="http://schemas.openxmlformats.org/presentationml/2006/main" xmlns:r="http://schemas.openxmlformats.org/officeDocument/2006/relationships">
+<p:sld xmlns:a="http://schemas.openxmlformats.org/drawingml/2006/main" xmlns:r="http://schemas.openxmlformats.org/officeDocument/2006/relationships" xmlns:p="http://schemas.openxmlformats.org/presentationml/2006/main">
   <p:cSld>
     <p:bg>
       <p:bgPr>
@@ -7874,7 +9663,14 @@
         <p:cNvGrpSpPr/>
         <p:nvPr/>
       </p:nvGrpSpPr>
-      <p:grpSpPr/>
+      <p:grpSpPr>
+        <a:xfrm>
+          <a:off x="0" y="0"/>
+          <a:ext cx="0" cy="0"/>
+          <a:chOff x="0" y="0"/>
+          <a:chExt cx="0" cy="0"/>
+        </a:xfrm>
+      </p:grpSpPr>
       <p:sp>
         <p:nvSpPr>
           <p:cNvPr id="2" name="TextBox 1"/>
@@ -7989,6 +9785,7 @@
           <a:lstStyle/>
           <a:p>
             <a:pPr algn="ctr"/>
+            <a:endParaRPr/>
           </a:p>
         </p:txBody>
       </p:sp>
@@ -8032,6 +9829,7 @@
           <a:lstStyle/>
           <a:p>
             <a:pPr algn="ctr"/>
+            <a:endParaRPr/>
           </a:p>
         </p:txBody>
       </p:sp>
@@ -8115,7 +9913,7 @@
         </p:nvSpPr>
         <p:spPr>
           <a:xfrm>
-            <a:off x="868680" y="2852928"/>
+            <a:off x="868680" y="3114188"/>
             <a:ext cx="3108960" cy="320040"/>
           </a:xfrm>
           <a:prstGeom prst="rect">
@@ -8138,6 +9936,7 @@
               </a:defRPr>
             </a:pPr>
             <a:r>
+              <a:rPr dirty="0"/>
               <a:t>• Automated VIN validation via NHTSA API</a:t>
             </a:r>
           </a:p>
@@ -8151,7 +9950,7 @@
         </p:nvSpPr>
         <p:spPr>
           <a:xfrm>
-            <a:off x="868680" y="3145536"/>
+            <a:off x="868680" y="3628866"/>
             <a:ext cx="3108960" cy="320040"/>
           </a:xfrm>
           <a:prstGeom prst="rect">
@@ -8174,6 +9973,7 @@
               </a:defRPr>
             </a:pPr>
             <a:r>
+              <a:rPr dirty="0"/>
               <a:t>• Milestone-based escrow verification</a:t>
             </a:r>
           </a:p>
@@ -8187,7 +9987,7 @@
         </p:nvSpPr>
         <p:spPr>
           <a:xfrm>
-            <a:off x="868680" y="3438144"/>
+            <a:off x="868680" y="3986788"/>
             <a:ext cx="3108960" cy="320040"/>
           </a:xfrm>
           <a:prstGeom prst="rect">
@@ -8210,6 +10010,7 @@
               </a:defRPr>
             </a:pPr>
             <a:r>
+              <a:rPr dirty="0"/>
               <a:t>• Vehicle telematics &amp; compliance monitoring</a:t>
             </a:r>
           </a:p>
@@ -8257,6 +10058,7 @@
           <a:lstStyle/>
           <a:p>
             <a:pPr algn="ctr"/>
+            <a:endParaRPr/>
           </a:p>
         </p:txBody>
       </p:sp>
@@ -8300,6 +10102,7 @@
           <a:lstStyle/>
           <a:p>
             <a:pPr algn="ctr"/>
+            <a:endParaRPr/>
           </a:p>
         </p:txBody>
       </p:sp>
@@ -8383,7 +10186,7 @@
         </p:nvSpPr>
         <p:spPr>
           <a:xfrm>
-            <a:off x="4709160" y="2852928"/>
+            <a:off x="4709160" y="3114188"/>
             <a:ext cx="3108960" cy="320040"/>
           </a:xfrm>
           <a:prstGeom prst="rect">
@@ -8406,6 +10209,7 @@
               </a:defRPr>
             </a:pPr>
             <a:r>
+              <a:rPr dirty="0"/>
               <a:t>• Orb-level ZK verification — sybil resistant</a:t>
             </a:r>
           </a:p>
@@ -8419,7 +10223,7 @@
         </p:nvSpPr>
         <p:spPr>
           <a:xfrm>
-            <a:off x="4709160" y="3145536"/>
+            <a:off x="4709160" y="3602739"/>
             <a:ext cx="3108960" cy="320040"/>
           </a:xfrm>
           <a:prstGeom prst="rect">
@@ -8442,7 +10246,16 @@
               </a:defRPr>
             </a:pPr>
             <a:r>
-              <a:t>• On-chain via WorldIDVerifier contract</a:t>
+              <a:rPr dirty="0"/>
+              <a:t>• On-chain via </a:t>
+            </a:r>
+            <a:r>
+              <a:rPr dirty="0" err="1"/>
+              <a:t>WorldIDVerifier</a:t>
+            </a:r>
+            <a:r>
+              <a:rPr dirty="0"/>
+              <a:t> contract</a:t>
             </a:r>
           </a:p>
         </p:txBody>
@@ -8455,7 +10268,7 @@
         </p:nvSpPr>
         <p:spPr>
           <a:xfrm>
-            <a:off x="4709160" y="3438144"/>
+            <a:off x="4709160" y="3960662"/>
             <a:ext cx="3108960" cy="320040"/>
           </a:xfrm>
           <a:prstGeom prst="rect">
@@ -8478,6 +10291,7 @@
               </a:defRPr>
             </a:pPr>
             <a:r>
+              <a:rPr dirty="0"/>
               <a:t>• One human = one verified investor account</a:t>
             </a:r>
           </a:p>
@@ -8525,6 +10339,7 @@
           <a:lstStyle/>
           <a:p>
             <a:pPr algn="ctr"/>
+            <a:endParaRPr/>
           </a:p>
         </p:txBody>
       </p:sp>
@@ -8568,6 +10383,7 @@
           <a:lstStyle/>
           <a:p>
             <a:pPr algn="ctr"/>
+            <a:endParaRPr/>
           </a:p>
         </p:txBody>
       </p:sp>
@@ -8651,7 +10467,7 @@
         </p:nvSpPr>
         <p:spPr>
           <a:xfrm>
-            <a:off x="8549640" y="2852928"/>
+            <a:off x="8549640" y="3127250"/>
             <a:ext cx="3108960" cy="320040"/>
           </a:xfrm>
           <a:prstGeom prst="rect">
@@ -8674,7 +10490,16 @@
               </a:defRPr>
             </a:pPr>
             <a:r>
-              <a:t>• RevenueToken — quarterly rental income rights</a:t>
+              <a:rPr dirty="0"/>
+              <a:t>• </a:t>
+            </a:r>
+            <a:r>
+              <a:rPr dirty="0" err="1"/>
+              <a:t>RevenueToken</a:t>
+            </a:r>
+            <a:r>
+              <a:rPr dirty="0"/>
+              <a:t> — quarterly rental income rights</a:t>
             </a:r>
           </a:p>
         </p:txBody>
@@ -8687,7 +10512,7 @@
         </p:nvSpPr>
         <p:spPr>
           <a:xfrm>
-            <a:off x="8549640" y="3145536"/>
+            <a:off x="8549640" y="3615800"/>
             <a:ext cx="3108960" cy="320040"/>
           </a:xfrm>
           <a:prstGeom prst="rect">
@@ -8710,6 +10535,7 @@
               </a:defRPr>
             </a:pPr>
             <a:r>
+              <a:rPr dirty="0"/>
               <a:t>• Identity Registry enforces compliance</a:t>
             </a:r>
           </a:p>
@@ -8723,7 +10549,7 @@
         </p:nvSpPr>
         <p:spPr>
           <a:xfrm>
-            <a:off x="8549640" y="3438144"/>
+            <a:off x="8549640" y="3947597"/>
             <a:ext cx="3108960" cy="320040"/>
           </a:xfrm>
           <a:prstGeom prst="rect">
@@ -8746,6 +10572,7 @@
               </a:defRPr>
             </a:pPr>
             <a:r>
+              <a:rPr dirty="0"/>
               <a:t>• Transfer restrictions by investor type &amp; KYC</a:t>
             </a:r>
           </a:p>
@@ -8796,7 +10623,7 @@
 </file>
 
 <file path=ppt/slides/slide4.xml><?xml version="1.0" encoding="utf-8"?>
-<p:sld xmlns:a="http://schemas.openxmlformats.org/drawingml/2006/main" xmlns:p="http://schemas.openxmlformats.org/presentationml/2006/main" xmlns:r="http://schemas.openxmlformats.org/officeDocument/2006/relationships">
+<p:sld xmlns:a="http://schemas.openxmlformats.org/drawingml/2006/main" xmlns:r="http://schemas.openxmlformats.org/officeDocument/2006/relationships" xmlns:p="http://schemas.openxmlformats.org/presentationml/2006/main">
   <p:cSld>
     <p:bg>
       <p:bgPr>
@@ -8812,7 +10639,14 @@
         <p:cNvGrpSpPr/>
         <p:nvPr/>
       </p:nvGrpSpPr>
-      <p:grpSpPr/>
+      <p:grpSpPr>
+        <a:xfrm>
+          <a:off x="0" y="0"/>
+          <a:ext cx="0" cy="0"/>
+          <a:chOff x="0" y="0"/>
+          <a:chExt cx="0" cy="0"/>
+        </a:xfrm>
+      </p:grpSpPr>
       <p:sp>
         <p:nvSpPr>
           <p:cNvPr id="2" name="TextBox 1"/>
@@ -8944,6 +10778,7 @@
           <a:lstStyle/>
           <a:p>
             <a:pPr algn="ctr"/>
+            <a:endParaRPr/>
           </a:p>
         </p:txBody>
       </p:sp>
@@ -9122,6 +10957,7 @@
           <a:lstStyle/>
           <a:p>
             <a:pPr algn="ctr"/>
+            <a:endParaRPr/>
           </a:p>
         </p:txBody>
       </p:sp>
@@ -9300,6 +11136,7 @@
           <a:lstStyle/>
           <a:p>
             <a:pPr algn="ctr"/>
+            <a:endParaRPr/>
           </a:p>
         </p:txBody>
       </p:sp>
@@ -9560,6 +11397,7 @@
           <a:lstStyle/>
           <a:p>
             <a:pPr algn="ctr"/>
+            <a:endParaRPr/>
           </a:p>
         </p:txBody>
       </p:sp>
@@ -9680,7 +11518,7 @@
 </file>
 
 <file path=ppt/slides/slide5.xml><?xml version="1.0" encoding="utf-8"?>
-<p:sld xmlns:a="http://schemas.openxmlformats.org/drawingml/2006/main" xmlns:p="http://schemas.openxmlformats.org/presentationml/2006/main" xmlns:r="http://schemas.openxmlformats.org/officeDocument/2006/relationships">
+<p:sld xmlns:a="http://schemas.openxmlformats.org/drawingml/2006/main" xmlns:r="http://schemas.openxmlformats.org/officeDocument/2006/relationships" xmlns:p="http://schemas.openxmlformats.org/presentationml/2006/main">
   <p:cSld>
     <p:bg>
       <p:bgPr>
@@ -9696,7 +11534,14 @@
         <p:cNvGrpSpPr/>
         <p:nvPr/>
       </p:nvGrpSpPr>
-      <p:grpSpPr/>
+      <p:grpSpPr>
+        <a:xfrm>
+          <a:off x="0" y="0"/>
+          <a:ext cx="0" cy="0"/>
+          <a:chOff x="0" y="0"/>
+          <a:chExt cx="0" cy="0"/>
+        </a:xfrm>
+      </p:grpSpPr>
       <p:sp>
         <p:nvSpPr>
           <p:cNvPr id="2" name="TextBox 1"/>
@@ -9811,6 +11656,7 @@
           <a:lstStyle/>
           <a:p>
             <a:pPr algn="ctr"/>
+            <a:endParaRPr/>
           </a:p>
         </p:txBody>
       </p:sp>
@@ -10000,6 +11846,7 @@
           <a:lstStyle/>
           <a:p>
             <a:pPr algn="ctr"/>
+            <a:endParaRPr/>
           </a:p>
         </p:txBody>
       </p:sp>
@@ -10189,6 +12036,7 @@
           <a:lstStyle/>
           <a:p>
             <a:pPr algn="ctr"/>
+            <a:endParaRPr/>
           </a:p>
         </p:txBody>
       </p:sp>
@@ -10378,6 +12226,7 @@
           <a:lstStyle/>
           <a:p>
             <a:pPr algn="ctr"/>
+            <a:endParaRPr/>
           </a:p>
         </p:txBody>
       </p:sp>
@@ -10567,6 +12416,7 @@
           <a:lstStyle/>
           <a:p>
             <a:pPr algn="ctr"/>
+            <a:endParaRPr/>
           </a:p>
         </p:txBody>
       </p:sp>
@@ -10756,6 +12606,7 @@
           <a:lstStyle/>
           <a:p>
             <a:pPr algn="ctr"/>
+            <a:endParaRPr/>
           </a:p>
         </p:txBody>
       </p:sp>
@@ -10984,7 +12835,7 @@
 </file>
 
 <file path=ppt/slides/slide6.xml><?xml version="1.0" encoding="utf-8"?>
-<p:sld xmlns:a="http://schemas.openxmlformats.org/drawingml/2006/main" xmlns:p="http://schemas.openxmlformats.org/presentationml/2006/main" xmlns:r="http://schemas.openxmlformats.org/officeDocument/2006/relationships">
+<p:sld xmlns:a="http://schemas.openxmlformats.org/drawingml/2006/main" xmlns:r="http://schemas.openxmlformats.org/officeDocument/2006/relationships" xmlns:p="http://schemas.openxmlformats.org/presentationml/2006/main">
   <p:cSld>
     <p:bg>
       <p:bgPr>
@@ -11000,7 +12851,14 @@
         <p:cNvGrpSpPr/>
         <p:nvPr/>
       </p:nvGrpSpPr>
-      <p:grpSpPr/>
+      <p:grpSpPr>
+        <a:xfrm>
+          <a:off x="0" y="0"/>
+          <a:ext cx="0" cy="0"/>
+          <a:chOff x="0" y="0"/>
+          <a:chExt cx="0" cy="0"/>
+        </a:xfrm>
+      </p:grpSpPr>
       <p:sp>
         <p:nvSpPr>
           <p:cNvPr id="2" name="TextBox 1"/>
@@ -11115,6 +12973,7 @@
           <a:lstStyle/>
           <a:p>
             <a:pPr algn="ctr"/>
+            <a:endParaRPr/>
           </a:p>
         </p:txBody>
       </p:sp>
@@ -11158,6 +13017,7 @@
           <a:lstStyle/>
           <a:p>
             <a:pPr algn="ctr"/>
+            <a:endParaRPr/>
           </a:p>
         </p:txBody>
       </p:sp>
@@ -11285,6 +13145,7 @@
           <a:lstStyle/>
           <a:p>
             <a:pPr algn="ctr"/>
+            <a:endParaRPr/>
           </a:p>
         </p:txBody>
       </p:sp>
@@ -11330,6 +13191,7 @@
           <a:lstStyle/>
           <a:p>
             <a:pPr algn="ctr"/>
+            <a:endParaRPr/>
           </a:p>
         </p:txBody>
       </p:sp>
@@ -11373,6 +13235,7 @@
           <a:lstStyle/>
           <a:p>
             <a:pPr algn="ctr"/>
+            <a:endParaRPr/>
           </a:p>
         </p:txBody>
       </p:sp>
@@ -11500,6 +13363,7 @@
           <a:lstStyle/>
           <a:p>
             <a:pPr algn="ctr"/>
+            <a:endParaRPr/>
           </a:p>
         </p:txBody>
       </p:sp>
@@ -11545,6 +13409,7 @@
           <a:lstStyle/>
           <a:p>
             <a:pPr algn="ctr"/>
+            <a:endParaRPr/>
           </a:p>
         </p:txBody>
       </p:sp>
@@ -11588,6 +13453,7 @@
           <a:lstStyle/>
           <a:p>
             <a:pPr algn="ctr"/>
+            <a:endParaRPr/>
           </a:p>
         </p:txBody>
       </p:sp>
@@ -11715,6 +13581,7 @@
           <a:lstStyle/>
           <a:p>
             <a:pPr algn="ctr"/>
+            <a:endParaRPr/>
           </a:p>
         </p:txBody>
       </p:sp>
@@ -11760,6 +13627,7 @@
           <a:lstStyle/>
           <a:p>
             <a:pPr algn="ctr"/>
+            <a:endParaRPr/>
           </a:p>
         </p:txBody>
       </p:sp>
@@ -11803,6 +13671,7 @@
           <a:lstStyle/>
           <a:p>
             <a:pPr algn="ctr"/>
+            <a:endParaRPr/>
           </a:p>
         </p:txBody>
       </p:sp>
@@ -11899,7 +13768,7 @@
         <p:spPr>
           <a:xfrm>
             <a:off x="731520" y="4937760"/>
-            <a:ext cx="10698480" cy="1371600"/>
+            <a:ext cx="10698480" cy="1737360"/>
           </a:xfrm>
           <a:prstGeom prst="roundRect">
             <a:avLst>
@@ -11932,6 +13801,7 @@
           <a:lstStyle/>
           <a:p>
             <a:pPr algn="ctr"/>
+            <a:endParaRPr/>
           </a:p>
         </p:txBody>
       </p:sp>
@@ -12151,7 +14021,7 @@
 </file>
 
 <file path=ppt/slides/slide7.xml><?xml version="1.0" encoding="utf-8"?>
-<p:sld xmlns:a="http://schemas.openxmlformats.org/drawingml/2006/main" xmlns:p="http://schemas.openxmlformats.org/presentationml/2006/main" xmlns:r="http://schemas.openxmlformats.org/officeDocument/2006/relationships">
+<p:sld xmlns:a="http://schemas.openxmlformats.org/drawingml/2006/main" xmlns:r="http://schemas.openxmlformats.org/officeDocument/2006/relationships" xmlns:p="http://schemas.openxmlformats.org/presentationml/2006/main">
   <p:cSld>
     <p:bg>
       <p:bgPr>
@@ -12167,7 +14037,14 @@
         <p:cNvGrpSpPr/>
         <p:nvPr/>
       </p:nvGrpSpPr>
-      <p:grpSpPr/>
+      <p:grpSpPr>
+        <a:xfrm>
+          <a:off x="0" y="0"/>
+          <a:ext cx="0" cy="0"/>
+          <a:chOff x="0" y="0"/>
+          <a:chExt cx="0" cy="0"/>
+        </a:xfrm>
+      </p:grpSpPr>
       <p:sp>
         <p:nvSpPr>
           <p:cNvPr id="2" name="TextBox 1"/>
@@ -12176,7 +14053,7 @@
         </p:nvSpPr>
         <p:spPr>
           <a:xfrm>
-            <a:off x="731520" y="457200"/>
+            <a:off x="731520" y="104501"/>
             <a:ext cx="10058400" cy="731520"/>
           </a:xfrm>
           <a:prstGeom prst="rect">
@@ -12199,6 +14076,7 @@
               </a:defRPr>
             </a:pPr>
             <a:r>
+              <a:rPr dirty="0"/>
               <a:t>Architecture Overview</a:t>
             </a:r>
           </a:p>
@@ -12212,7 +14090,7 @@
         </p:nvSpPr>
         <p:spPr>
           <a:xfrm>
-            <a:off x="548640" y="1645920"/>
+            <a:off x="548640" y="744581"/>
             <a:ext cx="11064240" cy="1828800"/>
           </a:xfrm>
           <a:prstGeom prst="roundRect">
@@ -12246,6 +14124,7 @@
           <a:lstStyle/>
           <a:p>
             <a:pPr algn="ctr"/>
+            <a:endParaRPr/>
           </a:p>
         </p:txBody>
       </p:sp>
@@ -12257,7 +14136,7 @@
         </p:nvSpPr>
         <p:spPr>
           <a:xfrm>
-            <a:off x="548640" y="1645920"/>
+            <a:off x="548640" y="744581"/>
             <a:ext cx="91440" cy="1828800"/>
           </a:xfrm>
           <a:prstGeom prst="rect">
@@ -12289,6 +14168,7 @@
           <a:lstStyle/>
           <a:p>
             <a:pPr algn="ctr"/>
+            <a:endParaRPr/>
           </a:p>
         </p:txBody>
       </p:sp>
@@ -12300,7 +14180,7 @@
         </p:nvSpPr>
         <p:spPr>
           <a:xfrm>
-            <a:off x="914400" y="1783080"/>
+            <a:off x="914400" y="881741"/>
             <a:ext cx="3657600" cy="365760"/>
           </a:xfrm>
           <a:prstGeom prst="rect">
@@ -12336,7 +14216,7 @@
         </p:nvSpPr>
         <p:spPr>
           <a:xfrm>
-            <a:off x="914400" y="2148840"/>
+            <a:off x="914400" y="1247501"/>
             <a:ext cx="5029200" cy="1188720"/>
           </a:xfrm>
           <a:prstGeom prst="rect">
@@ -12443,7 +14323,7 @@
         </p:nvSpPr>
         <p:spPr>
           <a:xfrm>
-            <a:off x="6217920" y="2148840"/>
+            <a:off x="6217920" y="1247501"/>
             <a:ext cx="5029200" cy="1188720"/>
           </a:xfrm>
           <a:prstGeom prst="rect">
@@ -12522,7 +14402,7 @@
         </p:nvSpPr>
         <p:spPr>
           <a:xfrm>
-            <a:off x="548640" y="3840480"/>
+            <a:off x="548640" y="2769322"/>
             <a:ext cx="11064240" cy="1828800"/>
           </a:xfrm>
           <a:prstGeom prst="roundRect">
@@ -12556,6 +14436,7 @@
           <a:lstStyle/>
           <a:p>
             <a:pPr algn="ctr"/>
+            <a:endParaRPr/>
           </a:p>
         </p:txBody>
       </p:sp>
@@ -12567,7 +14448,7 @@
         </p:nvSpPr>
         <p:spPr>
           <a:xfrm>
-            <a:off x="548640" y="3840480"/>
+            <a:off x="548640" y="2769322"/>
             <a:ext cx="91440" cy="1828800"/>
           </a:xfrm>
           <a:prstGeom prst="rect">
@@ -12599,6 +14480,7 @@
           <a:lstStyle/>
           <a:p>
             <a:pPr algn="ctr"/>
+            <a:endParaRPr/>
           </a:p>
         </p:txBody>
       </p:sp>
@@ -12610,7 +14492,7 @@
         </p:nvSpPr>
         <p:spPr>
           <a:xfrm>
-            <a:off x="914400" y="3977640"/>
+            <a:off x="914400" y="2906482"/>
             <a:ext cx="3657600" cy="365760"/>
           </a:xfrm>
           <a:prstGeom prst="rect">
@@ -12646,7 +14528,7 @@
         </p:nvSpPr>
         <p:spPr>
           <a:xfrm>
-            <a:off x="914400" y="4343400"/>
+            <a:off x="914400" y="3272242"/>
             <a:ext cx="5029200" cy="1188720"/>
           </a:xfrm>
           <a:prstGeom prst="rect">
@@ -12753,7 +14635,7 @@
         </p:nvSpPr>
         <p:spPr>
           <a:xfrm>
-            <a:off x="6217920" y="4343400"/>
+            <a:off x="6217920" y="3272242"/>
             <a:ext cx="5029200" cy="1188720"/>
           </a:xfrm>
           <a:prstGeom prst="rect">
@@ -12832,7 +14714,7 @@
         </p:nvSpPr>
         <p:spPr>
           <a:xfrm>
-            <a:off x="548640" y="6035040"/>
+            <a:off x="548640" y="4807130"/>
             <a:ext cx="11064240" cy="1828800"/>
           </a:xfrm>
           <a:prstGeom prst="roundRect">
@@ -12866,6 +14748,7 @@
           <a:lstStyle/>
           <a:p>
             <a:pPr algn="ctr"/>
+            <a:endParaRPr/>
           </a:p>
         </p:txBody>
       </p:sp>
@@ -12877,7 +14760,7 @@
         </p:nvSpPr>
         <p:spPr>
           <a:xfrm>
-            <a:off x="548640" y="6035040"/>
+            <a:off x="548640" y="4807130"/>
             <a:ext cx="91440" cy="1828800"/>
           </a:xfrm>
           <a:prstGeom prst="rect">
@@ -12909,6 +14792,7 @@
           <a:lstStyle/>
           <a:p>
             <a:pPr algn="ctr"/>
+            <a:endParaRPr/>
           </a:p>
         </p:txBody>
       </p:sp>
@@ -12920,7 +14804,7 @@
         </p:nvSpPr>
         <p:spPr>
           <a:xfrm>
-            <a:off x="914400" y="6172200"/>
+            <a:off x="914400" y="4944290"/>
             <a:ext cx="3657600" cy="365760"/>
           </a:xfrm>
           <a:prstGeom prst="rect">
@@ -12956,7 +14840,7 @@
         </p:nvSpPr>
         <p:spPr>
           <a:xfrm>
-            <a:off x="914400" y="6537960"/>
+            <a:off x="914400" y="5310050"/>
             <a:ext cx="5029200" cy="1188720"/>
           </a:xfrm>
           <a:prstGeom prst="rect">
@@ -13063,7 +14947,7 @@
         </p:nvSpPr>
         <p:spPr>
           <a:xfrm>
-            <a:off x="6217920" y="6537960"/>
+            <a:off x="6217920" y="5310050"/>
             <a:ext cx="5029200" cy="1188720"/>
           </a:xfrm>
           <a:prstGeom prst="rect">
@@ -13179,7 +15063,7 @@
 </file>
 
 <file path=ppt/slides/slide8.xml><?xml version="1.0" encoding="utf-8"?>
-<p:sld xmlns:a="http://schemas.openxmlformats.org/drawingml/2006/main" xmlns:p="http://schemas.openxmlformats.org/presentationml/2006/main" xmlns:r="http://schemas.openxmlformats.org/officeDocument/2006/relationships">
+<p:sld xmlns:a="http://schemas.openxmlformats.org/drawingml/2006/main" xmlns:r="http://schemas.openxmlformats.org/officeDocument/2006/relationships" xmlns:p="http://schemas.openxmlformats.org/presentationml/2006/main">
   <p:cSld>
     <p:bg>
       <p:bgPr>
@@ -13195,7 +15079,14 @@
         <p:cNvGrpSpPr/>
         <p:nvPr/>
       </p:nvGrpSpPr>
-      <p:grpSpPr/>
+      <p:grpSpPr>
+        <a:xfrm>
+          <a:off x="0" y="0"/>
+          <a:ext cx="0" cy="0"/>
+          <a:chOff x="0" y="0"/>
+          <a:chExt cx="0" cy="0"/>
+        </a:xfrm>
+      </p:grpSpPr>
       <p:sp>
         <p:nvSpPr>
           <p:cNvPr id="2" name="TextBox 1"/>
@@ -13346,6 +15237,7 @@
           <a:lstStyle/>
           <a:p>
             <a:pPr algn="ctr"/>
+            <a:endParaRPr/>
           </a:p>
         </p:txBody>
       </p:sp>
@@ -13499,6 +15391,7 @@
           <a:lstStyle/>
           <a:p>
             <a:pPr algn="ctr"/>
+            <a:endParaRPr/>
           </a:p>
         </p:txBody>
       </p:sp>
@@ -13652,6 +15545,7 @@
           <a:lstStyle/>
           <a:p>
             <a:pPr algn="ctr"/>
+            <a:endParaRPr/>
           </a:p>
         </p:txBody>
       </p:sp>
@@ -13841,6 +15735,7 @@
           <a:lstStyle/>
           <a:p>
             <a:pPr algn="ctr"/>
+            <a:endParaRPr/>
           </a:p>
         </p:txBody>
       </p:sp>
@@ -13994,6 +15889,7 @@
           <a:lstStyle/>
           <a:p>
             <a:pPr algn="ctr"/>
+            <a:endParaRPr/>
           </a:p>
         </p:txBody>
       </p:sp>
@@ -14147,6 +16043,7 @@
           <a:lstStyle/>
           <a:p>
             <a:pPr algn="ctr"/>
+            <a:endParaRPr/>
           </a:p>
         </p:txBody>
       </p:sp>
@@ -14336,6 +16233,7 @@
           <a:lstStyle/>
           <a:p>
             <a:pPr algn="ctr"/>
+            <a:endParaRPr/>
           </a:p>
         </p:txBody>
       </p:sp>
@@ -14489,6 +16387,7 @@
           <a:lstStyle/>
           <a:p>
             <a:pPr algn="ctr"/>
+            <a:endParaRPr/>
           </a:p>
         </p:txBody>
       </p:sp>
@@ -14642,6 +16541,7 @@
           <a:lstStyle/>
           <a:p>
             <a:pPr algn="ctr"/>
+            <a:endParaRPr/>
           </a:p>
         </p:txBody>
       </p:sp>
@@ -14831,6 +16731,7 @@
           <a:lstStyle/>
           <a:p>
             <a:pPr algn="ctr"/>
+            <a:endParaRPr/>
           </a:p>
         </p:txBody>
       </p:sp>
@@ -14984,6 +16885,7 @@
           <a:lstStyle/>
           <a:p>
             <a:pPr algn="ctr"/>
+            <a:endParaRPr/>
           </a:p>
         </p:txBody>
       </p:sp>
@@ -15137,6 +17039,7 @@
           <a:lstStyle/>
           <a:p>
             <a:pPr algn="ctr"/>
+            <a:endParaRPr/>
           </a:p>
         </p:txBody>
       </p:sp>
@@ -15293,7 +17196,7 @@
 </file>
 
 <file path=ppt/slides/slide9.xml><?xml version="1.0" encoding="utf-8"?>
-<p:sld xmlns:a="http://schemas.openxmlformats.org/drawingml/2006/main" xmlns:p="http://schemas.openxmlformats.org/presentationml/2006/main" xmlns:r="http://schemas.openxmlformats.org/officeDocument/2006/relationships">
+<p:sld xmlns:a="http://schemas.openxmlformats.org/drawingml/2006/main" xmlns:r="http://schemas.openxmlformats.org/officeDocument/2006/relationships" xmlns:p="http://schemas.openxmlformats.org/presentationml/2006/main">
   <p:cSld>
     <p:bg>
       <p:bgPr>
@@ -15309,7 +17212,14 @@
         <p:cNvGrpSpPr/>
         <p:nvPr/>
       </p:nvGrpSpPr>
-      <p:grpSpPr/>
+      <p:grpSpPr>
+        <a:xfrm>
+          <a:off x="0" y="0"/>
+          <a:ext cx="0" cy="0"/>
+          <a:chOff x="0" y="0"/>
+          <a:chExt cx="0" cy="0"/>
+        </a:xfrm>
+      </p:grpSpPr>
       <p:sp>
         <p:nvSpPr>
           <p:cNvPr id="2" name="TextBox 1"/>
@@ -15388,6 +17298,7 @@
           <a:lstStyle/>
           <a:p>
             <a:pPr algn="ctr"/>
+            <a:endParaRPr/>
           </a:p>
         </p:txBody>
       </p:sp>
@@ -15431,6 +17342,7 @@
           <a:lstStyle/>
           <a:p>
             <a:pPr algn="ctr"/>
+            <a:endParaRPr/>
           </a:p>
         </p:txBody>
       </p:sp>
@@ -15514,7 +17426,7 @@
         </p:nvSpPr>
         <p:spPr>
           <a:xfrm>
-            <a:off x="685800" y="2304288"/>
+            <a:off x="685800" y="2604736"/>
             <a:ext cx="2286000" cy="320040"/>
           </a:xfrm>
           <a:prstGeom prst="rect">
@@ -15550,7 +17462,7 @@
         </p:nvSpPr>
         <p:spPr>
           <a:xfrm>
-            <a:off x="685800" y="2596896"/>
+            <a:off x="685800" y="3158604"/>
             <a:ext cx="2286000" cy="320040"/>
           </a:xfrm>
           <a:prstGeom prst="rect">
@@ -15573,6 +17485,7 @@
               </a:defRPr>
             </a:pPr>
             <a:r>
+              <a:rPr dirty="0"/>
               <a:t>• KYC upload → ERC-3643 identity on-chain</a:t>
             </a:r>
           </a:p>
@@ -15586,7 +17499,7 @@
         </p:nvSpPr>
         <p:spPr>
           <a:xfrm>
-            <a:off x="685800" y="2889504"/>
+            <a:off x="685800" y="3738598"/>
             <a:ext cx="2286000" cy="320040"/>
           </a:xfrm>
           <a:prstGeom prst="rect">
@@ -15609,8 +17522,22 @@
               </a:defRPr>
             </a:pPr>
             <a:r>
-              <a:t>• Receive AssetTokens + RevenueTokens</a:t>
-            </a:r>
+              <a:rPr dirty="0"/>
+              <a:t>• Receive </a:t>
+            </a:r>
+            <a:r>
+              <a:rPr dirty="0" err="1"/>
+              <a:t>AssetTokens</a:t>
+            </a:r>
+            <a:r>
+              <a:rPr dirty="0"/>
+              <a:t> + </a:t>
+            </a:r>
+            <a:r>
+              <a:rPr dirty="0" err="1"/>
+              <a:t>RevenueTokens</a:t>
+            </a:r>
+            <a:endParaRPr dirty="0"/>
           </a:p>
         </p:txBody>
       </p:sp>
@@ -15622,7 +17549,7 @@
         </p:nvSpPr>
         <p:spPr>
           <a:xfrm>
-            <a:off x="685800" y="3182112"/>
+            <a:off x="685800" y="4396967"/>
             <a:ext cx="2286000" cy="320040"/>
           </a:xfrm>
           <a:prstGeom prst="rect">
@@ -15645,6 +17572,7 @@
               </a:defRPr>
             </a:pPr>
             <a:r>
+              <a:rPr dirty="0"/>
               <a:t>• Claim quarterly rental revenue</a:t>
             </a:r>
           </a:p>
@@ -15692,6 +17620,7 @@
           <a:lstStyle/>
           <a:p>
             <a:pPr algn="ctr"/>
+            <a:endParaRPr/>
           </a:p>
         </p:txBody>
       </p:sp>
@@ -15735,6 +17664,7 @@
           <a:lstStyle/>
           <a:p>
             <a:pPr algn="ctr"/>
+            <a:endParaRPr/>
           </a:p>
         </p:txBody>
       </p:sp>
@@ -15782,7 +17712,7 @@
         </p:nvSpPr>
         <p:spPr>
           <a:xfrm>
-            <a:off x="3611880" y="2011680"/>
+            <a:off x="3572691" y="2050869"/>
             <a:ext cx="2286000" cy="320040"/>
           </a:xfrm>
           <a:prstGeom prst="rect">
@@ -15805,6 +17735,7 @@
               </a:defRPr>
             </a:pPr>
             <a:r>
+              <a:rPr dirty="0"/>
               <a:t>• Register vehicles as ERC-721 NFTs</a:t>
             </a:r>
           </a:p>
@@ -15818,7 +17749,7 @@
         </p:nvSpPr>
         <p:spPr>
           <a:xfrm>
-            <a:off x="3611880" y="2304288"/>
+            <a:off x="3566160" y="2617469"/>
             <a:ext cx="2286000" cy="320040"/>
           </a:xfrm>
           <a:prstGeom prst="rect">
@@ -15841,6 +17772,7 @@
               </a:defRPr>
             </a:pPr>
             <a:r>
+              <a:rPr dirty="0"/>
               <a:t>• Create fundraising campaigns</a:t>
             </a:r>
           </a:p>
@@ -15854,7 +17786,7 @@
         </p:nvSpPr>
         <p:spPr>
           <a:xfrm>
-            <a:off x="3611880" y="2596896"/>
+            <a:off x="3557016" y="3182112"/>
             <a:ext cx="2286000" cy="320040"/>
           </a:xfrm>
           <a:prstGeom prst="rect">
@@ -15890,7 +17822,7 @@
         </p:nvSpPr>
         <p:spPr>
           <a:xfrm>
-            <a:off x="3611880" y="2889504"/>
+            <a:off x="3546566" y="3670011"/>
             <a:ext cx="2286000" cy="320040"/>
           </a:xfrm>
           <a:prstGeom prst="rect">
@@ -15913,6 +17845,7 @@
               </a:defRPr>
             </a:pPr>
             <a:r>
+              <a:rPr dirty="0"/>
               <a:t>• Earn 10% operator fee on revenue</a:t>
             </a:r>
           </a:p>
@@ -15926,7 +17859,7 @@
         </p:nvSpPr>
         <p:spPr>
           <a:xfrm>
-            <a:off x="3611880" y="3182112"/>
+            <a:off x="3546566" y="4366261"/>
             <a:ext cx="2286000" cy="320040"/>
           </a:xfrm>
           <a:prstGeom prst="rect">
@@ -15949,6 +17882,7 @@
               </a:defRPr>
             </a:pPr>
             <a:r>
+              <a:rPr dirty="0"/>
               <a:t>• Track analytics &amp; vehicle performance</a:t>
             </a:r>
           </a:p>
@@ -15996,6 +17930,7 @@
           <a:lstStyle/>
           <a:p>
             <a:pPr algn="ctr"/>
+            <a:endParaRPr/>
           </a:p>
         </p:txBody>
       </p:sp>
@@ -16039,6 +17974,7 @@
           <a:lstStyle/>
           <a:p>
             <a:pPr algn="ctr"/>
+            <a:endParaRPr/>
           </a:p>
         </p:txBody>
       </p:sp>
@@ -16086,7 +18022,7 @@
         </p:nvSpPr>
         <p:spPr>
           <a:xfrm>
-            <a:off x="6537960" y="2011680"/>
+            <a:off x="6492240" y="2050869"/>
             <a:ext cx="2286000" cy="320040"/>
           </a:xfrm>
           <a:prstGeom prst="rect">
@@ -16109,6 +18045,7 @@
               </a:defRPr>
             </a:pPr>
             <a:r>
+              <a:rPr dirty="0"/>
               <a:t>• Browse &amp; filter available vehicles</a:t>
             </a:r>
           </a:p>
@@ -16122,7 +18059,7 @@
         </p:nvSpPr>
         <p:spPr>
           <a:xfrm>
-            <a:off x="6537960" y="2304288"/>
+            <a:off x="6473952" y="2617469"/>
             <a:ext cx="2286000" cy="320040"/>
           </a:xfrm>
           <a:prstGeom prst="rect">
@@ -16145,6 +18082,7 @@
               </a:defRPr>
             </a:pPr>
             <a:r>
+              <a:rPr dirty="0"/>
               <a:t>• Book vehicles with date selection</a:t>
             </a:r>
           </a:p>
@@ -16158,7 +18096,7 @@
         </p:nvSpPr>
         <p:spPr>
           <a:xfrm>
-            <a:off x="6537960" y="2596896"/>
+            <a:off x="6446520" y="3178193"/>
             <a:ext cx="2286000" cy="320040"/>
           </a:xfrm>
           <a:prstGeom prst="rect">
@@ -16181,7 +18119,16 @@
               </a:defRPr>
             </a:pPr>
             <a:r>
-              <a:t>• Optional WorldID verification</a:t>
+              <a:rPr dirty="0"/>
+              <a:t>• Optional </a:t>
+            </a:r>
+            <a:r>
+              <a:rPr dirty="0" err="1"/>
+              <a:t>WorldID</a:t>
+            </a:r>
+            <a:r>
+              <a:rPr dirty="0"/>
+              <a:t> verification</a:t>
             </a:r>
           </a:p>
         </p:txBody>
@@ -16194,7 +18141,7 @@
         </p:nvSpPr>
         <p:spPr>
           <a:xfrm>
-            <a:off x="6537960" y="2889504"/>
+            <a:off x="6492240" y="3670011"/>
             <a:ext cx="2286000" cy="320040"/>
           </a:xfrm>
           <a:prstGeom prst="rect">
@@ -16217,6 +18164,7 @@
               </a:defRPr>
             </a:pPr>
             <a:r>
+              <a:rPr dirty="0"/>
               <a:t>• Leave reviews &amp; ratings</a:t>
             </a:r>
           </a:p>
@@ -16230,7 +18178,7 @@
         </p:nvSpPr>
         <p:spPr>
           <a:xfrm>
-            <a:off x="6537960" y="3182112"/>
+            <a:off x="6446520" y="4406111"/>
             <a:ext cx="2286000" cy="320040"/>
           </a:xfrm>
           <a:prstGeom prst="rect">
@@ -16253,6 +18201,7 @@
               </a:defRPr>
             </a:pPr>
             <a:r>
+              <a:rPr dirty="0"/>
               <a:t>• Track active &amp; past rentals</a:t>
             </a:r>
           </a:p>
@@ -16300,6 +18249,7 @@
           <a:lstStyle/>
           <a:p>
             <a:pPr algn="ctr"/>
+            <a:endParaRPr/>
           </a:p>
         </p:txBody>
       </p:sp>
@@ -16343,6 +18293,7 @@
           <a:lstStyle/>
           <a:p>
             <a:pPr algn="ctr"/>
+            <a:endParaRPr/>
           </a:p>
         </p:txBody>
       </p:sp>
@@ -16413,6 +18364,7 @@
               </a:defRPr>
             </a:pPr>
             <a:r>
+              <a:rPr dirty="0"/>
               <a:t>• Review &amp; approve KYC submissions</a:t>
             </a:r>
           </a:p>
@@ -16426,7 +18378,7 @@
         </p:nvSpPr>
         <p:spPr>
           <a:xfrm>
-            <a:off x="9464040" y="2304288"/>
+            <a:off x="9409176" y="2617469"/>
             <a:ext cx="2286000" cy="320040"/>
           </a:xfrm>
           <a:prstGeom prst="rect">
@@ -16462,7 +18414,7 @@
         </p:nvSpPr>
         <p:spPr>
           <a:xfrm>
-            <a:off x="9464040" y="2596896"/>
+            <a:off x="9418320" y="3144231"/>
             <a:ext cx="2286000" cy="320040"/>
           </a:xfrm>
           <a:prstGeom prst="rect">
@@ -16485,6 +18437,7 @@
               </a:defRPr>
             </a:pPr>
             <a:r>
+              <a:rPr dirty="0"/>
               <a:t>• Track milestone verification status</a:t>
             </a:r>
           </a:p>
@@ -16498,7 +18451,7 @@
         </p:nvSpPr>
         <p:spPr>
           <a:xfrm>
-            <a:off x="9464040" y="2889504"/>
+            <a:off x="9418320" y="3707893"/>
             <a:ext cx="2286000" cy="320040"/>
           </a:xfrm>
           <a:prstGeom prst="rect">
@@ -16521,6 +18474,7 @@
               </a:defRPr>
             </a:pPr>
             <a:r>
+              <a:rPr dirty="0"/>
               <a:t>• Manage disputes &amp; refunds</a:t>
             </a:r>
           </a:p>
@@ -16534,7 +18488,7 @@
         </p:nvSpPr>
         <p:spPr>
           <a:xfrm>
-            <a:off x="9464040" y="3182112"/>
+            <a:off x="9464040" y="4366261"/>
             <a:ext cx="2286000" cy="320040"/>
           </a:xfrm>
           <a:prstGeom prst="rect">
@@ -16557,6 +18511,7 @@
               </a:defRPr>
             </a:pPr>
             <a:r>
+              <a:rPr dirty="0"/>
               <a:t>• Revenue distribution oversight</a:t>
             </a:r>
           </a:p>
@@ -16924,4 +18879,299 @@
   </a:objectDefaults>
   <a:extraClrSchemeLst/>
 </a:theme>
+</file>
+
+<file path=ppt/theme/theme2.xml><?xml version="1.0" encoding="utf-8"?>
+<a:theme xmlns:a="http://schemas.openxmlformats.org/drawingml/2006/main" name="Office Theme">
+  <a:themeElements>
+    <a:clrScheme name="Office">
+      <a:dk1>
+        <a:sysClr val="windowText" lastClr="000000"/>
+      </a:dk1>
+      <a:lt1>
+        <a:sysClr val="window" lastClr="FFFFFF"/>
+      </a:lt1>
+      <a:dk2>
+        <a:srgbClr val="44546A"/>
+      </a:dk2>
+      <a:lt2>
+        <a:srgbClr val="E7E6E6"/>
+      </a:lt2>
+      <a:accent1>
+        <a:srgbClr val="4472C4"/>
+      </a:accent1>
+      <a:accent2>
+        <a:srgbClr val="ED7D31"/>
+      </a:accent2>
+      <a:accent3>
+        <a:srgbClr val="A5A5A5"/>
+      </a:accent3>
+      <a:accent4>
+        <a:srgbClr val="FFC000"/>
+      </a:accent4>
+      <a:accent5>
+        <a:srgbClr val="5B9BD5"/>
+      </a:accent5>
+      <a:accent6>
+        <a:srgbClr val="70AD47"/>
+      </a:accent6>
+      <a:hlink>
+        <a:srgbClr val="0563C1"/>
+      </a:hlink>
+      <a:folHlink>
+        <a:srgbClr val="954F72"/>
+      </a:folHlink>
+    </a:clrScheme>
+    <a:fontScheme name="Office">
+      <a:majorFont>
+        <a:latin typeface="Calibri Light" panose="020F0302020204030204"/>
+        <a:ea typeface=""/>
+        <a:cs typeface=""/>
+        <a:font script="Jpan" typeface="游ゴシック Light"/>
+        <a:font script="Hang" typeface="맑은 고딕"/>
+        <a:font script="Hans" typeface="等线 Light"/>
+        <a:font script="Hant" typeface="新細明體"/>
+        <a:font script="Arab" typeface="Times New Roman"/>
+        <a:font script="Hebr" typeface="Times New Roman"/>
+        <a:font script="Thai" typeface="Angsana New"/>
+        <a:font script="Ethi" typeface="Nyala"/>
+        <a:font script="Beng" typeface="Vrinda"/>
+        <a:font script="Gujr" typeface="Shruti"/>
+        <a:font script="Khmr" typeface="MoolBoran"/>
+        <a:font script="Knda" typeface="Tunga"/>
+        <a:font script="Guru" typeface="Raavi"/>
+        <a:font script="Cans" typeface="Euphemia"/>
+        <a:font script="Cher" typeface="Plantagenet Cherokee"/>
+        <a:font script="Yiii" typeface="Microsoft Yi Baiti"/>
+        <a:font script="Tibt" typeface="Microsoft Himalaya"/>
+        <a:font script="Thaa" typeface="MV Boli"/>
+        <a:font script="Deva" typeface="Mangal"/>
+        <a:font script="Telu" typeface="Gautami"/>
+        <a:font script="Taml" typeface="Latha"/>
+        <a:font script="Syrc" typeface="Estrangelo Edessa"/>
+        <a:font script="Orya" typeface="Kalinga"/>
+        <a:font script="Mlym" typeface="Kartika"/>
+        <a:font script="Laoo" typeface="DokChampa"/>
+        <a:font script="Sinh" typeface="Iskoola Pota"/>
+        <a:font script="Mong" typeface="Mongolian Baiti"/>
+        <a:font script="Viet" typeface="Times New Roman"/>
+        <a:font script="Uigh" typeface="Microsoft Uighur"/>
+        <a:font script="Geor" typeface="Sylfaen"/>
+        <a:font script="Armn" typeface="Arial"/>
+        <a:font script="Bugi" typeface="Leelawadee UI"/>
+        <a:font script="Bopo" typeface="Microsoft JhengHei"/>
+        <a:font script="Java" typeface="Javanese Text"/>
+        <a:font script="Lisu" typeface="Segoe UI"/>
+        <a:font script="Mymr" typeface="Myanmar Text"/>
+        <a:font script="Nkoo" typeface="Ebrima"/>
+        <a:font script="Olck" typeface="Nirmala UI"/>
+        <a:font script="Osma" typeface="Ebrima"/>
+        <a:font script="Phag" typeface="Phagspa"/>
+        <a:font script="Syrn" typeface="Estrangelo Edessa"/>
+        <a:font script="Syrj" typeface="Estrangelo Edessa"/>
+        <a:font script="Syre" typeface="Estrangelo Edessa"/>
+        <a:font script="Sora" typeface="Nirmala UI"/>
+        <a:font script="Tale" typeface="Microsoft Tai Le"/>
+        <a:font script="Talu" typeface="Microsoft New Tai Lue"/>
+        <a:font script="Tfng" typeface="Ebrima"/>
+      </a:majorFont>
+      <a:minorFont>
+        <a:latin typeface="Calibri" panose="020F0502020204030204"/>
+        <a:ea typeface=""/>
+        <a:cs typeface=""/>
+        <a:font script="Jpan" typeface="游ゴシック"/>
+        <a:font script="Hang" typeface="맑은 고딕"/>
+        <a:font script="Hans" typeface="等线"/>
+        <a:font script="Hant" typeface="新細明體"/>
+        <a:font script="Arab" typeface="Arial"/>
+        <a:font script="Hebr" typeface="Arial"/>
+        <a:font script="Thai" typeface="Cordia New"/>
+        <a:font script="Ethi" typeface="Nyala"/>
+        <a:font script="Beng" typeface="Vrinda"/>
+        <a:font script="Gujr" typeface="Shruti"/>
+        <a:font script="Khmr" typeface="DaunPenh"/>
+        <a:font script="Knda" typeface="Tunga"/>
+        <a:font script="Guru" typeface="Raavi"/>
+        <a:font script="Cans" typeface="Euphemia"/>
+        <a:font script="Cher" typeface="Plantagenet Cherokee"/>
+        <a:font script="Yiii" typeface="Microsoft Yi Baiti"/>
+        <a:font script="Tibt" typeface="Microsoft Himalaya"/>
+        <a:font script="Thaa" typeface="MV Boli"/>
+        <a:font script="Deva" typeface="Mangal"/>
+        <a:font script="Telu" typeface="Gautami"/>
+        <a:font script="Taml" typeface="Latha"/>
+        <a:font script="Syrc" typeface="Estrangelo Edessa"/>
+        <a:font script="Orya" typeface="Kalinga"/>
+        <a:font script="Mlym" typeface="Kartika"/>
+        <a:font script="Laoo" typeface="DokChampa"/>
+        <a:font script="Sinh" typeface="Iskoola Pota"/>
+        <a:font script="Mong" typeface="Mongolian Baiti"/>
+        <a:font script="Viet" typeface="Arial"/>
+        <a:font script="Uigh" typeface="Microsoft Uighur"/>
+        <a:font script="Geor" typeface="Sylfaen"/>
+        <a:font script="Armn" typeface="Arial"/>
+        <a:font script="Bugi" typeface="Leelawadee UI"/>
+        <a:font script="Bopo" typeface="Microsoft JhengHei"/>
+        <a:font script="Java" typeface="Javanese Text"/>
+        <a:font script="Lisu" typeface="Segoe UI"/>
+        <a:font script="Mymr" typeface="Myanmar Text"/>
+        <a:font script="Nkoo" typeface="Ebrima"/>
+        <a:font script="Olck" typeface="Nirmala UI"/>
+        <a:font script="Osma" typeface="Ebrima"/>
+        <a:font script="Phag" typeface="Phagspa"/>
+        <a:font script="Syrn" typeface="Estrangelo Edessa"/>
+        <a:font script="Syrj" typeface="Estrangelo Edessa"/>
+        <a:font script="Syre" typeface="Estrangelo Edessa"/>
+        <a:font script="Sora" typeface="Nirmala UI"/>
+        <a:font script="Tale" typeface="Microsoft Tai Le"/>
+        <a:font script="Talu" typeface="Microsoft New Tai Lue"/>
+        <a:font script="Tfng" typeface="Ebrima"/>
+      </a:minorFont>
+    </a:fontScheme>
+    <a:fmtScheme name="Office">
+      <a:fillStyleLst>
+        <a:solidFill>
+          <a:schemeClr val="phClr"/>
+        </a:solidFill>
+        <a:gradFill rotWithShape="1">
+          <a:gsLst>
+            <a:gs pos="0">
+              <a:schemeClr val="phClr">
+                <a:lumMod val="110000"/>
+                <a:satMod val="105000"/>
+                <a:tint val="67000"/>
+              </a:schemeClr>
+            </a:gs>
+            <a:gs pos="50000">
+              <a:schemeClr val="phClr">
+                <a:lumMod val="105000"/>
+                <a:satMod val="103000"/>
+                <a:tint val="73000"/>
+              </a:schemeClr>
+            </a:gs>
+            <a:gs pos="100000">
+              <a:schemeClr val="phClr">
+                <a:lumMod val="105000"/>
+                <a:satMod val="109000"/>
+                <a:tint val="81000"/>
+              </a:schemeClr>
+            </a:gs>
+          </a:gsLst>
+          <a:lin ang="5400000" scaled="0"/>
+        </a:gradFill>
+        <a:gradFill rotWithShape="1">
+          <a:gsLst>
+            <a:gs pos="0">
+              <a:schemeClr val="phClr">
+                <a:satMod val="103000"/>
+                <a:lumMod val="102000"/>
+                <a:tint val="94000"/>
+              </a:schemeClr>
+            </a:gs>
+            <a:gs pos="50000">
+              <a:schemeClr val="phClr">
+                <a:satMod val="110000"/>
+                <a:lumMod val="100000"/>
+                <a:shade val="100000"/>
+              </a:schemeClr>
+            </a:gs>
+            <a:gs pos="100000">
+              <a:schemeClr val="phClr">
+                <a:lumMod val="99000"/>
+                <a:satMod val="120000"/>
+                <a:shade val="78000"/>
+              </a:schemeClr>
+            </a:gs>
+          </a:gsLst>
+          <a:lin ang="5400000" scaled="0"/>
+        </a:gradFill>
+      </a:fillStyleLst>
+      <a:lnStyleLst>
+        <a:ln w="6350" cap="flat" cmpd="sng" algn="ctr">
+          <a:solidFill>
+            <a:schemeClr val="phClr"/>
+          </a:solidFill>
+          <a:prstDash val="solid"/>
+          <a:miter lim="800000"/>
+        </a:ln>
+        <a:ln w="12700" cap="flat" cmpd="sng" algn="ctr">
+          <a:solidFill>
+            <a:schemeClr val="phClr"/>
+          </a:solidFill>
+          <a:prstDash val="solid"/>
+          <a:miter lim="800000"/>
+        </a:ln>
+        <a:ln w="19050" cap="flat" cmpd="sng" algn="ctr">
+          <a:solidFill>
+            <a:schemeClr val="phClr"/>
+          </a:solidFill>
+          <a:prstDash val="solid"/>
+          <a:miter lim="800000"/>
+        </a:ln>
+      </a:lnStyleLst>
+      <a:effectStyleLst>
+        <a:effectStyle>
+          <a:effectLst/>
+        </a:effectStyle>
+        <a:effectStyle>
+          <a:effectLst/>
+        </a:effectStyle>
+        <a:effectStyle>
+          <a:effectLst>
+            <a:outerShdw blurRad="57150" dist="19050" dir="5400000" algn="ctr" rotWithShape="0">
+              <a:srgbClr val="000000">
+                <a:alpha val="63000"/>
+              </a:srgbClr>
+            </a:outerShdw>
+          </a:effectLst>
+        </a:effectStyle>
+      </a:effectStyleLst>
+      <a:bgFillStyleLst>
+        <a:solidFill>
+          <a:schemeClr val="phClr"/>
+        </a:solidFill>
+        <a:solidFill>
+          <a:schemeClr val="phClr">
+            <a:tint val="95000"/>
+            <a:satMod val="170000"/>
+          </a:schemeClr>
+        </a:solidFill>
+        <a:gradFill rotWithShape="1">
+          <a:gsLst>
+            <a:gs pos="0">
+              <a:schemeClr val="phClr">
+                <a:tint val="93000"/>
+                <a:satMod val="150000"/>
+                <a:shade val="98000"/>
+                <a:lumMod val="102000"/>
+              </a:schemeClr>
+            </a:gs>
+            <a:gs pos="50000">
+              <a:schemeClr val="phClr">
+                <a:tint val="98000"/>
+                <a:satMod val="130000"/>
+                <a:shade val="90000"/>
+                <a:lumMod val="103000"/>
+              </a:schemeClr>
+            </a:gs>
+            <a:gs pos="100000">
+              <a:schemeClr val="phClr">
+                <a:shade val="63000"/>
+                <a:satMod val="120000"/>
+              </a:schemeClr>
+            </a:gs>
+          </a:gsLst>
+          <a:lin ang="5400000" scaled="0"/>
+        </a:gradFill>
+      </a:bgFillStyleLst>
+    </a:fmtScheme>
+  </a:themeElements>
+  <a:objectDefaults/>
+  <a:extraClrSchemeLst/>
+  <a:extLst>
+    <a:ext uri="{05A4C25C-085E-4340-85A3-A5531E510DB2}">
+      <thm15:themeFamily xmlns:thm15="http://schemas.microsoft.com/office/thememl/2012/main" name="Office Theme" id="{62F939B6-93AF-4DB8-9C6B-D6C7DFDC589F}" vid="{4A3C46E8-61CC-4603-A589-7422A47A8E4A}"/>
+    </a:ext>
+  </a:extLst>
+</a:theme>
 </file>